--- a/docs/plots/grant/jx_grant_egfr_diff_hist.pptx
+++ b/docs/plots/grant/jx_grant_egfr_diff_hist.pptx
@@ -2271,7 +2271,7 @@
           </p:nvSpPr>
           <p:spPr>
             <a:xfrm>
-              <a:off x="994649" y="5106500"/>
+              <a:off x="994649" y="5138490"/>
               <a:ext cx="7603582" cy="0"/>
             </a:xfrm>
             <a:custGeom>
@@ -2314,7 +2314,7 @@
           </p:nvSpPr>
           <p:spPr>
             <a:xfrm>
-              <a:off x="994649" y="4475090"/>
+              <a:off x="994649" y="4496553"/>
               <a:ext cx="7603582" cy="0"/>
             </a:xfrm>
             <a:custGeom>
@@ -2357,7 +2357,7 @@
           </p:nvSpPr>
           <p:spPr>
             <a:xfrm>
-              <a:off x="994649" y="3843680"/>
+              <a:off x="994649" y="3854617"/>
               <a:ext cx="7603582" cy="0"/>
             </a:xfrm>
             <a:custGeom>
@@ -2400,7 +2400,7 @@
           </p:nvSpPr>
           <p:spPr>
             <a:xfrm>
-              <a:off x="994649" y="3212270"/>
+              <a:off x="994649" y="3212680"/>
               <a:ext cx="7603582" cy="0"/>
             </a:xfrm>
             <a:custGeom>
@@ -2443,7 +2443,7 @@
           </p:nvSpPr>
           <p:spPr>
             <a:xfrm>
-              <a:off x="994649" y="2580860"/>
+              <a:off x="994649" y="2570743"/>
               <a:ext cx="7603582" cy="0"/>
             </a:xfrm>
             <a:custGeom>
@@ -2486,15 +2486,15 @@
           </p:nvSpPr>
           <p:spPr>
             <a:xfrm>
-              <a:off x="1871985" y="2244282"/>
-              <a:ext cx="0" cy="3329252"/>
+              <a:off x="1074407" y="2228554"/>
+              <a:ext cx="0" cy="3384756"/>
             </a:xfrm>
             <a:custGeom>
               <a:avLst/>
               <a:pathLst>
-                <a:path w="0" h="3329252">
+                <a:path w="0" h="3384756">
                   <a:moveTo>
-                    <a:pt x="0" y="3329252"/>
+                    <a:pt x="0" y="3384756"/>
                   </a:moveTo>
                   <a:lnTo>
                     <a:pt x="0" y="0"/>
@@ -2529,15 +2529,15 @@
           </p:nvSpPr>
           <p:spPr>
             <a:xfrm>
-              <a:off x="2935423" y="2244282"/>
-              <a:ext cx="0" cy="3329252"/>
+              <a:off x="1606126" y="2228554"/>
+              <a:ext cx="0" cy="3384756"/>
             </a:xfrm>
             <a:custGeom>
               <a:avLst/>
               <a:pathLst>
-                <a:path w="0" h="3329252">
+                <a:path w="0" h="3384756">
                   <a:moveTo>
-                    <a:pt x="0" y="3329252"/>
+                    <a:pt x="0" y="3384756"/>
                   </a:moveTo>
                   <a:lnTo>
                     <a:pt x="0" y="0"/>
@@ -2572,15 +2572,15 @@
           </p:nvSpPr>
           <p:spPr>
             <a:xfrm>
-              <a:off x="3998862" y="2244282"/>
-              <a:ext cx="0" cy="3329252"/>
+              <a:off x="2137845" y="2228554"/>
+              <a:ext cx="0" cy="3384756"/>
             </a:xfrm>
             <a:custGeom>
               <a:avLst/>
               <a:pathLst>
-                <a:path w="0" h="3329252">
+                <a:path w="0" h="3384756">
                   <a:moveTo>
-                    <a:pt x="0" y="3329252"/>
+                    <a:pt x="0" y="3384756"/>
                   </a:moveTo>
                   <a:lnTo>
                     <a:pt x="0" y="0"/>
@@ -2615,15 +2615,15 @@
           </p:nvSpPr>
           <p:spPr>
             <a:xfrm>
-              <a:off x="5062300" y="2244282"/>
-              <a:ext cx="0" cy="3329252"/>
+              <a:off x="2669564" y="2228554"/>
+              <a:ext cx="0" cy="3384756"/>
             </a:xfrm>
             <a:custGeom>
               <a:avLst/>
               <a:pathLst>
-                <a:path w="0" h="3329252">
+                <a:path w="0" h="3384756">
                   <a:moveTo>
-                    <a:pt x="0" y="3329252"/>
+                    <a:pt x="0" y="3384756"/>
                   </a:moveTo>
                   <a:lnTo>
                     <a:pt x="0" y="0"/>
@@ -2658,15 +2658,15 @@
           </p:nvSpPr>
           <p:spPr>
             <a:xfrm>
-              <a:off x="6125738" y="2244282"/>
-              <a:ext cx="0" cy="3329252"/>
+              <a:off x="3201283" y="2228554"/>
+              <a:ext cx="0" cy="3384756"/>
             </a:xfrm>
             <a:custGeom>
               <a:avLst/>
               <a:pathLst>
-                <a:path w="0" h="3329252">
+                <a:path w="0" h="3384756">
                   <a:moveTo>
-                    <a:pt x="0" y="3329252"/>
+                    <a:pt x="0" y="3384756"/>
                   </a:moveTo>
                   <a:lnTo>
                     <a:pt x="0" y="0"/>
@@ -2701,15 +2701,15 @@
           </p:nvSpPr>
           <p:spPr>
             <a:xfrm>
-              <a:off x="7189176" y="2244282"/>
-              <a:ext cx="0" cy="3329252"/>
+              <a:off x="3733002" y="2228554"/>
+              <a:ext cx="0" cy="3384756"/>
             </a:xfrm>
             <a:custGeom>
               <a:avLst/>
               <a:pathLst>
-                <a:path w="0" h="3329252">
+                <a:path w="0" h="3384756">
                   <a:moveTo>
-                    <a:pt x="0" y="3329252"/>
+                    <a:pt x="0" y="3384756"/>
                   </a:moveTo>
                   <a:lnTo>
                     <a:pt x="0" y="0"/>
@@ -2744,15 +2744,15 @@
           </p:nvSpPr>
           <p:spPr>
             <a:xfrm>
-              <a:off x="8252614" y="2244282"/>
-              <a:ext cx="0" cy="3329252"/>
+              <a:off x="4264721" y="2228554"/>
+              <a:ext cx="0" cy="3384756"/>
             </a:xfrm>
             <a:custGeom>
               <a:avLst/>
               <a:pathLst>
-                <a:path w="0" h="3329252">
+                <a:path w="0" h="3384756">
                   <a:moveTo>
-                    <a:pt x="0" y="3329252"/>
+                    <a:pt x="0" y="3384756"/>
                   </a:moveTo>
                   <a:lnTo>
                     <a:pt x="0" y="0"/>
@@ -2787,7 +2787,351 @@
           </p:nvSpPr>
           <p:spPr>
             <a:xfrm>
-              <a:off x="994649" y="5422205"/>
+              <a:off x="4796440" y="2228554"/>
+              <a:ext cx="0" cy="3384756"/>
+            </a:xfrm>
+            <a:custGeom>
+              <a:avLst/>
+              <a:pathLst>
+                <a:path w="0" h="3384756">
+                  <a:moveTo>
+                    <a:pt x="0" y="3384756"/>
+                  </a:moveTo>
+                  <a:lnTo>
+                    <a:pt x="0" y="0"/>
+                  </a:lnTo>
+                  <a:lnTo>
+                    <a:pt x="0" y="0"/>
+                  </a:lnTo>
+                </a:path>
+              </a:pathLst>
+            </a:custGeom>
+            <a:ln w="8623" cap="flat">
+              <a:solidFill>
+                <a:srgbClr val="EBEBEB">
+                  <a:alpha val="100000"/>
+                </a:srgbClr>
+              </a:solidFill>
+              <a:prstDash val="solid"/>
+              <a:round/>
+            </a:ln>
+          </p:spPr>
+          <p:txBody>
+            <a:bodyPr/>
+            <a:lstStyle/>
+            <a:p/>
+          </p:txBody>
+        </p:sp>
+        <p:sp>
+          <p:nvSpPr>
+            <p:cNvPr id="17" name="pl17"/>
+            <p:cNvSpPr/>
+            <p:nvPr/>
+          </p:nvSpPr>
+          <p:spPr>
+            <a:xfrm>
+              <a:off x="5328159" y="2228554"/>
+              <a:ext cx="0" cy="3384756"/>
+            </a:xfrm>
+            <a:custGeom>
+              <a:avLst/>
+              <a:pathLst>
+                <a:path w="0" h="3384756">
+                  <a:moveTo>
+                    <a:pt x="0" y="3384756"/>
+                  </a:moveTo>
+                  <a:lnTo>
+                    <a:pt x="0" y="0"/>
+                  </a:lnTo>
+                  <a:lnTo>
+                    <a:pt x="0" y="0"/>
+                  </a:lnTo>
+                </a:path>
+              </a:pathLst>
+            </a:custGeom>
+            <a:ln w="8623" cap="flat">
+              <a:solidFill>
+                <a:srgbClr val="EBEBEB">
+                  <a:alpha val="100000"/>
+                </a:srgbClr>
+              </a:solidFill>
+              <a:prstDash val="solid"/>
+              <a:round/>
+            </a:ln>
+          </p:spPr>
+          <p:txBody>
+            <a:bodyPr/>
+            <a:lstStyle/>
+            <a:p/>
+          </p:txBody>
+        </p:sp>
+        <p:sp>
+          <p:nvSpPr>
+            <p:cNvPr id="18" name="pl18"/>
+            <p:cNvSpPr/>
+            <p:nvPr/>
+          </p:nvSpPr>
+          <p:spPr>
+            <a:xfrm>
+              <a:off x="5859878" y="2228554"/>
+              <a:ext cx="0" cy="3384756"/>
+            </a:xfrm>
+            <a:custGeom>
+              <a:avLst/>
+              <a:pathLst>
+                <a:path w="0" h="3384756">
+                  <a:moveTo>
+                    <a:pt x="0" y="3384756"/>
+                  </a:moveTo>
+                  <a:lnTo>
+                    <a:pt x="0" y="0"/>
+                  </a:lnTo>
+                  <a:lnTo>
+                    <a:pt x="0" y="0"/>
+                  </a:lnTo>
+                </a:path>
+              </a:pathLst>
+            </a:custGeom>
+            <a:ln w="8623" cap="flat">
+              <a:solidFill>
+                <a:srgbClr val="EBEBEB">
+                  <a:alpha val="100000"/>
+                </a:srgbClr>
+              </a:solidFill>
+              <a:prstDash val="solid"/>
+              <a:round/>
+            </a:ln>
+          </p:spPr>
+          <p:txBody>
+            <a:bodyPr/>
+            <a:lstStyle/>
+            <a:p/>
+          </p:txBody>
+        </p:sp>
+        <p:sp>
+          <p:nvSpPr>
+            <p:cNvPr id="19" name="pl19"/>
+            <p:cNvSpPr/>
+            <p:nvPr/>
+          </p:nvSpPr>
+          <p:spPr>
+            <a:xfrm>
+              <a:off x="6391597" y="2228554"/>
+              <a:ext cx="0" cy="3384756"/>
+            </a:xfrm>
+            <a:custGeom>
+              <a:avLst/>
+              <a:pathLst>
+                <a:path w="0" h="3384756">
+                  <a:moveTo>
+                    <a:pt x="0" y="3384756"/>
+                  </a:moveTo>
+                  <a:lnTo>
+                    <a:pt x="0" y="0"/>
+                  </a:lnTo>
+                  <a:lnTo>
+                    <a:pt x="0" y="0"/>
+                  </a:lnTo>
+                </a:path>
+              </a:pathLst>
+            </a:custGeom>
+            <a:ln w="8623" cap="flat">
+              <a:solidFill>
+                <a:srgbClr val="EBEBEB">
+                  <a:alpha val="100000"/>
+                </a:srgbClr>
+              </a:solidFill>
+              <a:prstDash val="solid"/>
+              <a:round/>
+            </a:ln>
+          </p:spPr>
+          <p:txBody>
+            <a:bodyPr/>
+            <a:lstStyle/>
+            <a:p/>
+          </p:txBody>
+        </p:sp>
+        <p:sp>
+          <p:nvSpPr>
+            <p:cNvPr id="20" name="pl20"/>
+            <p:cNvSpPr/>
+            <p:nvPr/>
+          </p:nvSpPr>
+          <p:spPr>
+            <a:xfrm>
+              <a:off x="6923317" y="2228554"/>
+              <a:ext cx="0" cy="3384756"/>
+            </a:xfrm>
+            <a:custGeom>
+              <a:avLst/>
+              <a:pathLst>
+                <a:path w="0" h="3384756">
+                  <a:moveTo>
+                    <a:pt x="0" y="3384756"/>
+                  </a:moveTo>
+                  <a:lnTo>
+                    <a:pt x="0" y="0"/>
+                  </a:lnTo>
+                  <a:lnTo>
+                    <a:pt x="0" y="0"/>
+                  </a:lnTo>
+                </a:path>
+              </a:pathLst>
+            </a:custGeom>
+            <a:ln w="8623" cap="flat">
+              <a:solidFill>
+                <a:srgbClr val="EBEBEB">
+                  <a:alpha val="100000"/>
+                </a:srgbClr>
+              </a:solidFill>
+              <a:prstDash val="solid"/>
+              <a:round/>
+            </a:ln>
+          </p:spPr>
+          <p:txBody>
+            <a:bodyPr/>
+            <a:lstStyle/>
+            <a:p/>
+          </p:txBody>
+        </p:sp>
+        <p:sp>
+          <p:nvSpPr>
+            <p:cNvPr id="21" name="pl21"/>
+            <p:cNvSpPr/>
+            <p:nvPr/>
+          </p:nvSpPr>
+          <p:spPr>
+            <a:xfrm>
+              <a:off x="7455036" y="2228554"/>
+              <a:ext cx="0" cy="3384756"/>
+            </a:xfrm>
+            <a:custGeom>
+              <a:avLst/>
+              <a:pathLst>
+                <a:path w="0" h="3384756">
+                  <a:moveTo>
+                    <a:pt x="0" y="3384756"/>
+                  </a:moveTo>
+                  <a:lnTo>
+                    <a:pt x="0" y="0"/>
+                  </a:lnTo>
+                  <a:lnTo>
+                    <a:pt x="0" y="0"/>
+                  </a:lnTo>
+                </a:path>
+              </a:pathLst>
+            </a:custGeom>
+            <a:ln w="8623" cap="flat">
+              <a:solidFill>
+                <a:srgbClr val="EBEBEB">
+                  <a:alpha val="100000"/>
+                </a:srgbClr>
+              </a:solidFill>
+              <a:prstDash val="solid"/>
+              <a:round/>
+            </a:ln>
+          </p:spPr>
+          <p:txBody>
+            <a:bodyPr/>
+            <a:lstStyle/>
+            <a:p/>
+          </p:txBody>
+        </p:sp>
+        <p:sp>
+          <p:nvSpPr>
+            <p:cNvPr id="22" name="pl22"/>
+            <p:cNvSpPr/>
+            <p:nvPr/>
+          </p:nvSpPr>
+          <p:spPr>
+            <a:xfrm>
+              <a:off x="7986755" y="2228554"/>
+              <a:ext cx="0" cy="3384756"/>
+            </a:xfrm>
+            <a:custGeom>
+              <a:avLst/>
+              <a:pathLst>
+                <a:path w="0" h="3384756">
+                  <a:moveTo>
+                    <a:pt x="0" y="3384756"/>
+                  </a:moveTo>
+                  <a:lnTo>
+                    <a:pt x="0" y="0"/>
+                  </a:lnTo>
+                  <a:lnTo>
+                    <a:pt x="0" y="0"/>
+                  </a:lnTo>
+                </a:path>
+              </a:pathLst>
+            </a:custGeom>
+            <a:ln w="8623" cap="flat">
+              <a:solidFill>
+                <a:srgbClr val="EBEBEB">
+                  <a:alpha val="100000"/>
+                </a:srgbClr>
+              </a:solidFill>
+              <a:prstDash val="solid"/>
+              <a:round/>
+            </a:ln>
+          </p:spPr>
+          <p:txBody>
+            <a:bodyPr/>
+            <a:lstStyle/>
+            <a:p/>
+          </p:txBody>
+        </p:sp>
+        <p:sp>
+          <p:nvSpPr>
+            <p:cNvPr id="23" name="pl23"/>
+            <p:cNvSpPr/>
+            <p:nvPr/>
+          </p:nvSpPr>
+          <p:spPr>
+            <a:xfrm>
+              <a:off x="8518474" y="2228554"/>
+              <a:ext cx="0" cy="3384756"/>
+            </a:xfrm>
+            <a:custGeom>
+              <a:avLst/>
+              <a:pathLst>
+                <a:path w="0" h="3384756">
+                  <a:moveTo>
+                    <a:pt x="0" y="3384756"/>
+                  </a:moveTo>
+                  <a:lnTo>
+                    <a:pt x="0" y="0"/>
+                  </a:lnTo>
+                  <a:lnTo>
+                    <a:pt x="0" y="0"/>
+                  </a:lnTo>
+                </a:path>
+              </a:pathLst>
+            </a:custGeom>
+            <a:ln w="8623" cap="flat">
+              <a:solidFill>
+                <a:srgbClr val="EBEBEB">
+                  <a:alpha val="100000"/>
+                </a:srgbClr>
+              </a:solidFill>
+              <a:prstDash val="solid"/>
+              <a:round/>
+            </a:ln>
+          </p:spPr>
+          <p:txBody>
+            <a:bodyPr/>
+            <a:lstStyle/>
+            <a:p/>
+          </p:txBody>
+        </p:sp>
+        <p:sp>
+          <p:nvSpPr>
+            <p:cNvPr id="24" name="pl24"/>
+            <p:cNvSpPr/>
+            <p:nvPr/>
+          </p:nvSpPr>
+          <p:spPr>
+            <a:xfrm>
+              <a:off x="994649" y="5459458"/>
               <a:ext cx="7603582" cy="0"/>
             </a:xfrm>
             <a:custGeom>
@@ -2824,13 +3168,13 @@
         </p:sp>
         <p:sp>
           <p:nvSpPr>
-            <p:cNvPr id="17" name="pl17"/>
-            <p:cNvSpPr/>
-            <p:nvPr/>
-          </p:nvSpPr>
-          <p:spPr>
-            <a:xfrm>
-              <a:off x="994649" y="4790795"/>
+            <p:cNvPr id="25" name="pl25"/>
+            <p:cNvSpPr/>
+            <p:nvPr/>
+          </p:nvSpPr>
+          <p:spPr>
+            <a:xfrm>
+              <a:off x="994649" y="4817522"/>
               <a:ext cx="7603582" cy="0"/>
             </a:xfrm>
             <a:custGeom>
@@ -2867,13 +3211,13 @@
         </p:sp>
         <p:sp>
           <p:nvSpPr>
-            <p:cNvPr id="18" name="pl18"/>
-            <p:cNvSpPr/>
-            <p:nvPr/>
-          </p:nvSpPr>
-          <p:spPr>
-            <a:xfrm>
-              <a:off x="994649" y="4159385"/>
+            <p:cNvPr id="26" name="pl26"/>
+            <p:cNvSpPr/>
+            <p:nvPr/>
+          </p:nvSpPr>
+          <p:spPr>
+            <a:xfrm>
+              <a:off x="994649" y="4175585"/>
               <a:ext cx="7603582" cy="0"/>
             </a:xfrm>
             <a:custGeom>
@@ -2910,13 +3254,13 @@
         </p:sp>
         <p:sp>
           <p:nvSpPr>
-            <p:cNvPr id="19" name="pl19"/>
-            <p:cNvSpPr/>
-            <p:nvPr/>
-          </p:nvSpPr>
-          <p:spPr>
-            <a:xfrm>
-              <a:off x="994649" y="3527975"/>
+            <p:cNvPr id="27" name="pl27"/>
+            <p:cNvSpPr/>
+            <p:nvPr/>
+          </p:nvSpPr>
+          <p:spPr>
+            <a:xfrm>
+              <a:off x="994649" y="3533648"/>
               <a:ext cx="7603582" cy="0"/>
             </a:xfrm>
             <a:custGeom>
@@ -2953,13 +3297,13 @@
         </p:sp>
         <p:sp>
           <p:nvSpPr>
-            <p:cNvPr id="20" name="pl20"/>
-            <p:cNvSpPr/>
-            <p:nvPr/>
-          </p:nvSpPr>
-          <p:spPr>
-            <a:xfrm>
-              <a:off x="994649" y="2896565"/>
+            <p:cNvPr id="28" name="pl28"/>
+            <p:cNvSpPr/>
+            <p:nvPr/>
+          </p:nvSpPr>
+          <p:spPr>
+            <a:xfrm>
+              <a:off x="994649" y="2891712"/>
               <a:ext cx="7603582" cy="0"/>
             </a:xfrm>
             <a:custGeom>
@@ -2996,13 +3340,13 @@
         </p:sp>
         <p:sp>
           <p:nvSpPr>
-            <p:cNvPr id="21" name="pl21"/>
-            <p:cNvSpPr/>
-            <p:nvPr/>
-          </p:nvSpPr>
-          <p:spPr>
-            <a:xfrm>
-              <a:off x="994649" y="2265155"/>
+            <p:cNvPr id="29" name="pl29"/>
+            <p:cNvSpPr/>
+            <p:nvPr/>
+          </p:nvSpPr>
+          <p:spPr>
+            <a:xfrm>
+              <a:off x="994649" y="2249775"/>
               <a:ext cx="7603582" cy="0"/>
             </a:xfrm>
             <a:custGeom>
@@ -3039,21 +3383,21 @@
         </p:sp>
         <p:sp>
           <p:nvSpPr>
-            <p:cNvPr id="22" name="pl22"/>
-            <p:cNvSpPr/>
-            <p:nvPr/>
-          </p:nvSpPr>
-          <p:spPr>
-            <a:xfrm>
-              <a:off x="1340266" y="2244282"/>
-              <a:ext cx="0" cy="3329252"/>
+            <p:cNvPr id="30" name="pl30"/>
+            <p:cNvSpPr/>
+            <p:nvPr/>
+          </p:nvSpPr>
+          <p:spPr>
+            <a:xfrm>
+              <a:off x="1340266" y="2228554"/>
+              <a:ext cx="0" cy="3384756"/>
             </a:xfrm>
             <a:custGeom>
               <a:avLst/>
               <a:pathLst>
-                <a:path w="0" h="3329252">
+                <a:path w="0" h="3384756">
                   <a:moveTo>
-                    <a:pt x="0" y="3329252"/>
+                    <a:pt x="0" y="3384756"/>
                   </a:moveTo>
                   <a:lnTo>
                     <a:pt x="0" y="0"/>
@@ -3082,21 +3426,21 @@
         </p:sp>
         <p:sp>
           <p:nvSpPr>
-            <p:cNvPr id="23" name="pl23"/>
-            <p:cNvSpPr/>
-            <p:nvPr/>
-          </p:nvSpPr>
-          <p:spPr>
-            <a:xfrm>
-              <a:off x="2403704" y="2244282"/>
-              <a:ext cx="0" cy="3329252"/>
+            <p:cNvPr id="31" name="pl31"/>
+            <p:cNvSpPr/>
+            <p:nvPr/>
+          </p:nvSpPr>
+          <p:spPr>
+            <a:xfrm>
+              <a:off x="1871985" y="2228554"/>
+              <a:ext cx="0" cy="3384756"/>
             </a:xfrm>
             <a:custGeom>
               <a:avLst/>
               <a:pathLst>
-                <a:path w="0" h="3329252">
+                <a:path w="0" h="3384756">
                   <a:moveTo>
-                    <a:pt x="0" y="3329252"/>
+                    <a:pt x="0" y="3384756"/>
                   </a:moveTo>
                   <a:lnTo>
                     <a:pt x="0" y="0"/>
@@ -3125,21 +3469,21 @@
         </p:sp>
         <p:sp>
           <p:nvSpPr>
-            <p:cNvPr id="24" name="pl24"/>
-            <p:cNvSpPr/>
-            <p:nvPr/>
-          </p:nvSpPr>
-          <p:spPr>
-            <a:xfrm>
-              <a:off x="3467142" y="2244282"/>
-              <a:ext cx="0" cy="3329252"/>
+            <p:cNvPr id="32" name="pl32"/>
+            <p:cNvSpPr/>
+            <p:nvPr/>
+          </p:nvSpPr>
+          <p:spPr>
+            <a:xfrm>
+              <a:off x="2403704" y="2228554"/>
+              <a:ext cx="0" cy="3384756"/>
             </a:xfrm>
             <a:custGeom>
               <a:avLst/>
               <a:pathLst>
-                <a:path w="0" h="3329252">
+                <a:path w="0" h="3384756">
                   <a:moveTo>
-                    <a:pt x="0" y="3329252"/>
+                    <a:pt x="0" y="3384756"/>
                   </a:moveTo>
                   <a:lnTo>
                     <a:pt x="0" y="0"/>
@@ -3168,21 +3512,21 @@
         </p:sp>
         <p:sp>
           <p:nvSpPr>
-            <p:cNvPr id="25" name="pl25"/>
-            <p:cNvSpPr/>
-            <p:nvPr/>
-          </p:nvSpPr>
-          <p:spPr>
-            <a:xfrm>
-              <a:off x="4530581" y="2244282"/>
-              <a:ext cx="0" cy="3329252"/>
+            <p:cNvPr id="33" name="pl33"/>
+            <p:cNvSpPr/>
+            <p:nvPr/>
+          </p:nvSpPr>
+          <p:spPr>
+            <a:xfrm>
+              <a:off x="2935423" y="2228554"/>
+              <a:ext cx="0" cy="3384756"/>
             </a:xfrm>
             <a:custGeom>
               <a:avLst/>
               <a:pathLst>
-                <a:path w="0" h="3329252">
+                <a:path w="0" h="3384756">
                   <a:moveTo>
-                    <a:pt x="0" y="3329252"/>
+                    <a:pt x="0" y="3384756"/>
                   </a:moveTo>
                   <a:lnTo>
                     <a:pt x="0" y="0"/>
@@ -3211,21 +3555,21 @@
         </p:sp>
         <p:sp>
           <p:nvSpPr>
-            <p:cNvPr id="26" name="pl26"/>
-            <p:cNvSpPr/>
-            <p:nvPr/>
-          </p:nvSpPr>
-          <p:spPr>
-            <a:xfrm>
-              <a:off x="5594019" y="2244282"/>
-              <a:ext cx="0" cy="3329252"/>
+            <p:cNvPr id="34" name="pl34"/>
+            <p:cNvSpPr/>
+            <p:nvPr/>
+          </p:nvSpPr>
+          <p:spPr>
+            <a:xfrm>
+              <a:off x="3467142" y="2228554"/>
+              <a:ext cx="0" cy="3384756"/>
             </a:xfrm>
             <a:custGeom>
               <a:avLst/>
               <a:pathLst>
-                <a:path w="0" h="3329252">
+                <a:path w="0" h="3384756">
                   <a:moveTo>
-                    <a:pt x="0" y="3329252"/>
+                    <a:pt x="0" y="3384756"/>
                   </a:moveTo>
                   <a:lnTo>
                     <a:pt x="0" y="0"/>
@@ -3254,21 +3598,21 @@
         </p:sp>
         <p:sp>
           <p:nvSpPr>
-            <p:cNvPr id="27" name="pl27"/>
-            <p:cNvSpPr/>
-            <p:nvPr/>
-          </p:nvSpPr>
-          <p:spPr>
-            <a:xfrm>
-              <a:off x="6657457" y="2244282"/>
-              <a:ext cx="0" cy="3329252"/>
+            <p:cNvPr id="35" name="pl35"/>
+            <p:cNvSpPr/>
+            <p:nvPr/>
+          </p:nvSpPr>
+          <p:spPr>
+            <a:xfrm>
+              <a:off x="3998862" y="2228554"/>
+              <a:ext cx="0" cy="3384756"/>
             </a:xfrm>
             <a:custGeom>
               <a:avLst/>
               <a:pathLst>
-                <a:path w="0" h="3329252">
+                <a:path w="0" h="3384756">
                   <a:moveTo>
-                    <a:pt x="0" y="3329252"/>
+                    <a:pt x="0" y="3384756"/>
                   </a:moveTo>
                   <a:lnTo>
                     <a:pt x="0" y="0"/>
@@ -3297,21 +3641,21 @@
         </p:sp>
         <p:sp>
           <p:nvSpPr>
-            <p:cNvPr id="28" name="pl28"/>
-            <p:cNvSpPr/>
-            <p:nvPr/>
-          </p:nvSpPr>
-          <p:spPr>
-            <a:xfrm>
-              <a:off x="7720895" y="2244282"/>
-              <a:ext cx="0" cy="3329252"/>
+            <p:cNvPr id="36" name="pl36"/>
+            <p:cNvSpPr/>
+            <p:nvPr/>
+          </p:nvSpPr>
+          <p:spPr>
+            <a:xfrm>
+              <a:off x="4530581" y="2228554"/>
+              <a:ext cx="0" cy="3384756"/>
             </a:xfrm>
             <a:custGeom>
               <a:avLst/>
               <a:pathLst>
-                <a:path w="0" h="3329252">
+                <a:path w="0" h="3384756">
                   <a:moveTo>
-                    <a:pt x="0" y="3329252"/>
+                    <a:pt x="0" y="3384756"/>
                   </a:moveTo>
                   <a:lnTo>
                     <a:pt x="0" y="0"/>
@@ -3340,14 +3684,315 @@
         </p:sp>
         <p:sp>
           <p:nvSpPr>
-            <p:cNvPr id="29" name="rc29"/>
-            <p:cNvSpPr/>
-            <p:nvPr/>
-          </p:nvSpPr>
-          <p:spPr>
-            <a:xfrm>
-              <a:off x="1340266" y="5317839"/>
-              <a:ext cx="531719" cy="104365"/>
+            <p:cNvPr id="37" name="pl37"/>
+            <p:cNvSpPr/>
+            <p:nvPr/>
+          </p:nvSpPr>
+          <p:spPr>
+            <a:xfrm>
+              <a:off x="5062300" y="2228554"/>
+              <a:ext cx="0" cy="3384756"/>
+            </a:xfrm>
+            <a:custGeom>
+              <a:avLst/>
+              <a:pathLst>
+                <a:path w="0" h="3384756">
+                  <a:moveTo>
+                    <a:pt x="0" y="3384756"/>
+                  </a:moveTo>
+                  <a:lnTo>
+                    <a:pt x="0" y="0"/>
+                  </a:lnTo>
+                  <a:lnTo>
+                    <a:pt x="0" y="0"/>
+                  </a:lnTo>
+                </a:path>
+              </a:pathLst>
+            </a:custGeom>
+            <a:ln w="17246" cap="flat">
+              <a:solidFill>
+                <a:srgbClr val="EBEBEB">
+                  <a:alpha val="100000"/>
+                </a:srgbClr>
+              </a:solidFill>
+              <a:prstDash val="solid"/>
+              <a:round/>
+            </a:ln>
+          </p:spPr>
+          <p:txBody>
+            <a:bodyPr/>
+            <a:lstStyle/>
+            <a:p/>
+          </p:txBody>
+        </p:sp>
+        <p:sp>
+          <p:nvSpPr>
+            <p:cNvPr id="38" name="pl38"/>
+            <p:cNvSpPr/>
+            <p:nvPr/>
+          </p:nvSpPr>
+          <p:spPr>
+            <a:xfrm>
+              <a:off x="5594019" y="2228554"/>
+              <a:ext cx="0" cy="3384756"/>
+            </a:xfrm>
+            <a:custGeom>
+              <a:avLst/>
+              <a:pathLst>
+                <a:path w="0" h="3384756">
+                  <a:moveTo>
+                    <a:pt x="0" y="3384756"/>
+                  </a:moveTo>
+                  <a:lnTo>
+                    <a:pt x="0" y="0"/>
+                  </a:lnTo>
+                  <a:lnTo>
+                    <a:pt x="0" y="0"/>
+                  </a:lnTo>
+                </a:path>
+              </a:pathLst>
+            </a:custGeom>
+            <a:ln w="17246" cap="flat">
+              <a:solidFill>
+                <a:srgbClr val="EBEBEB">
+                  <a:alpha val="100000"/>
+                </a:srgbClr>
+              </a:solidFill>
+              <a:prstDash val="solid"/>
+              <a:round/>
+            </a:ln>
+          </p:spPr>
+          <p:txBody>
+            <a:bodyPr/>
+            <a:lstStyle/>
+            <a:p/>
+          </p:txBody>
+        </p:sp>
+        <p:sp>
+          <p:nvSpPr>
+            <p:cNvPr id="39" name="pl39"/>
+            <p:cNvSpPr/>
+            <p:nvPr/>
+          </p:nvSpPr>
+          <p:spPr>
+            <a:xfrm>
+              <a:off x="6125738" y="2228554"/>
+              <a:ext cx="0" cy="3384756"/>
+            </a:xfrm>
+            <a:custGeom>
+              <a:avLst/>
+              <a:pathLst>
+                <a:path w="0" h="3384756">
+                  <a:moveTo>
+                    <a:pt x="0" y="3384756"/>
+                  </a:moveTo>
+                  <a:lnTo>
+                    <a:pt x="0" y="0"/>
+                  </a:lnTo>
+                  <a:lnTo>
+                    <a:pt x="0" y="0"/>
+                  </a:lnTo>
+                </a:path>
+              </a:pathLst>
+            </a:custGeom>
+            <a:ln w="17246" cap="flat">
+              <a:solidFill>
+                <a:srgbClr val="EBEBEB">
+                  <a:alpha val="100000"/>
+                </a:srgbClr>
+              </a:solidFill>
+              <a:prstDash val="solid"/>
+              <a:round/>
+            </a:ln>
+          </p:spPr>
+          <p:txBody>
+            <a:bodyPr/>
+            <a:lstStyle/>
+            <a:p/>
+          </p:txBody>
+        </p:sp>
+        <p:sp>
+          <p:nvSpPr>
+            <p:cNvPr id="40" name="pl40"/>
+            <p:cNvSpPr/>
+            <p:nvPr/>
+          </p:nvSpPr>
+          <p:spPr>
+            <a:xfrm>
+              <a:off x="6657457" y="2228554"/>
+              <a:ext cx="0" cy="3384756"/>
+            </a:xfrm>
+            <a:custGeom>
+              <a:avLst/>
+              <a:pathLst>
+                <a:path w="0" h="3384756">
+                  <a:moveTo>
+                    <a:pt x="0" y="3384756"/>
+                  </a:moveTo>
+                  <a:lnTo>
+                    <a:pt x="0" y="0"/>
+                  </a:lnTo>
+                  <a:lnTo>
+                    <a:pt x="0" y="0"/>
+                  </a:lnTo>
+                </a:path>
+              </a:pathLst>
+            </a:custGeom>
+            <a:ln w="17246" cap="flat">
+              <a:solidFill>
+                <a:srgbClr val="EBEBEB">
+                  <a:alpha val="100000"/>
+                </a:srgbClr>
+              </a:solidFill>
+              <a:prstDash val="solid"/>
+              <a:round/>
+            </a:ln>
+          </p:spPr>
+          <p:txBody>
+            <a:bodyPr/>
+            <a:lstStyle/>
+            <a:p/>
+          </p:txBody>
+        </p:sp>
+        <p:sp>
+          <p:nvSpPr>
+            <p:cNvPr id="41" name="pl41"/>
+            <p:cNvSpPr/>
+            <p:nvPr/>
+          </p:nvSpPr>
+          <p:spPr>
+            <a:xfrm>
+              <a:off x="7189176" y="2228554"/>
+              <a:ext cx="0" cy="3384756"/>
+            </a:xfrm>
+            <a:custGeom>
+              <a:avLst/>
+              <a:pathLst>
+                <a:path w="0" h="3384756">
+                  <a:moveTo>
+                    <a:pt x="0" y="3384756"/>
+                  </a:moveTo>
+                  <a:lnTo>
+                    <a:pt x="0" y="0"/>
+                  </a:lnTo>
+                  <a:lnTo>
+                    <a:pt x="0" y="0"/>
+                  </a:lnTo>
+                </a:path>
+              </a:pathLst>
+            </a:custGeom>
+            <a:ln w="17246" cap="flat">
+              <a:solidFill>
+                <a:srgbClr val="EBEBEB">
+                  <a:alpha val="100000"/>
+                </a:srgbClr>
+              </a:solidFill>
+              <a:prstDash val="solid"/>
+              <a:round/>
+            </a:ln>
+          </p:spPr>
+          <p:txBody>
+            <a:bodyPr/>
+            <a:lstStyle/>
+            <a:p/>
+          </p:txBody>
+        </p:sp>
+        <p:sp>
+          <p:nvSpPr>
+            <p:cNvPr id="42" name="pl42"/>
+            <p:cNvSpPr/>
+            <p:nvPr/>
+          </p:nvSpPr>
+          <p:spPr>
+            <a:xfrm>
+              <a:off x="7720895" y="2228554"/>
+              <a:ext cx="0" cy="3384756"/>
+            </a:xfrm>
+            <a:custGeom>
+              <a:avLst/>
+              <a:pathLst>
+                <a:path w="0" h="3384756">
+                  <a:moveTo>
+                    <a:pt x="0" y="3384756"/>
+                  </a:moveTo>
+                  <a:lnTo>
+                    <a:pt x="0" y="0"/>
+                  </a:lnTo>
+                  <a:lnTo>
+                    <a:pt x="0" y="0"/>
+                  </a:lnTo>
+                </a:path>
+              </a:pathLst>
+            </a:custGeom>
+            <a:ln w="17246" cap="flat">
+              <a:solidFill>
+                <a:srgbClr val="EBEBEB">
+                  <a:alpha val="100000"/>
+                </a:srgbClr>
+              </a:solidFill>
+              <a:prstDash val="solid"/>
+              <a:round/>
+            </a:ln>
+          </p:spPr>
+          <p:txBody>
+            <a:bodyPr/>
+            <a:lstStyle/>
+            <a:p/>
+          </p:txBody>
+        </p:sp>
+        <p:sp>
+          <p:nvSpPr>
+            <p:cNvPr id="43" name="pl43"/>
+            <p:cNvSpPr/>
+            <p:nvPr/>
+          </p:nvSpPr>
+          <p:spPr>
+            <a:xfrm>
+              <a:off x="8252614" y="2228554"/>
+              <a:ext cx="0" cy="3384756"/>
+            </a:xfrm>
+            <a:custGeom>
+              <a:avLst/>
+              <a:pathLst>
+                <a:path w="0" h="3384756">
+                  <a:moveTo>
+                    <a:pt x="0" y="3384756"/>
+                  </a:moveTo>
+                  <a:lnTo>
+                    <a:pt x="0" y="0"/>
+                  </a:lnTo>
+                  <a:lnTo>
+                    <a:pt x="0" y="0"/>
+                  </a:lnTo>
+                </a:path>
+              </a:pathLst>
+            </a:custGeom>
+            <a:ln w="17246" cap="flat">
+              <a:solidFill>
+                <a:srgbClr val="EBEBEB">
+                  <a:alpha val="100000"/>
+                </a:srgbClr>
+              </a:solidFill>
+              <a:prstDash val="solid"/>
+              <a:round/>
+            </a:ln>
+          </p:spPr>
+          <p:txBody>
+            <a:bodyPr/>
+            <a:lstStyle/>
+            <a:p/>
+          </p:txBody>
+        </p:sp>
+        <p:sp>
+          <p:nvSpPr>
+            <p:cNvPr id="44" name="rc44"/>
+            <p:cNvSpPr/>
+            <p:nvPr/>
+          </p:nvSpPr>
+          <p:spPr>
+            <a:xfrm>
+              <a:off x="1340266" y="5353353"/>
+              <a:ext cx="531719" cy="106105"/>
             </a:xfrm>
             <a:prstGeom prst="rect">
               <a:avLst/>
@@ -3375,14 +4020,14 @@
         </p:sp>
         <p:sp>
           <p:nvSpPr>
-            <p:cNvPr id="30" name="rc30"/>
-            <p:cNvSpPr/>
-            <p:nvPr/>
-          </p:nvSpPr>
-          <p:spPr>
-            <a:xfrm>
-              <a:off x="1871985" y="5004743"/>
-              <a:ext cx="531719" cy="417461"/>
+            <p:cNvPr id="45" name="rc45"/>
+            <p:cNvSpPr/>
+            <p:nvPr/>
+          </p:nvSpPr>
+          <p:spPr>
+            <a:xfrm>
+              <a:off x="1871985" y="5035037"/>
+              <a:ext cx="531719" cy="424420"/>
             </a:xfrm>
             <a:prstGeom prst="rect">
               <a:avLst/>
@@ -3410,14 +4055,14 @@
         </p:sp>
         <p:sp>
           <p:nvSpPr>
-            <p:cNvPr id="31" name="rc31"/>
-            <p:cNvSpPr/>
-            <p:nvPr/>
-          </p:nvSpPr>
-          <p:spPr>
-            <a:xfrm>
-              <a:off x="2403704" y="5109109"/>
-              <a:ext cx="531719" cy="313095"/>
+            <p:cNvPr id="46" name="rc46"/>
+            <p:cNvSpPr/>
+            <p:nvPr/>
+          </p:nvSpPr>
+          <p:spPr>
+            <a:xfrm>
+              <a:off x="2403704" y="5141142"/>
+              <a:ext cx="531719" cy="318315"/>
             </a:xfrm>
             <a:prstGeom prst="rect">
               <a:avLst/>
@@ -3445,14 +4090,14 @@
         </p:sp>
         <p:sp>
           <p:nvSpPr>
-            <p:cNvPr id="32" name="rc32"/>
-            <p:cNvSpPr/>
-            <p:nvPr/>
-          </p:nvSpPr>
-          <p:spPr>
-            <a:xfrm>
-              <a:off x="2935423" y="4378552"/>
-              <a:ext cx="531719" cy="1043652"/>
+            <p:cNvPr id="47" name="rc47"/>
+            <p:cNvSpPr/>
+            <p:nvPr/>
+          </p:nvSpPr>
+          <p:spPr>
+            <a:xfrm>
+              <a:off x="2935423" y="4398406"/>
+              <a:ext cx="531719" cy="1061052"/>
             </a:xfrm>
             <a:prstGeom prst="rect">
               <a:avLst/>
@@ -3480,14 +4125,14 @@
         </p:sp>
         <p:sp>
           <p:nvSpPr>
-            <p:cNvPr id="33" name="rc33"/>
-            <p:cNvSpPr/>
-            <p:nvPr/>
-          </p:nvSpPr>
-          <p:spPr>
-            <a:xfrm>
-              <a:off x="3467142" y="3230534"/>
-              <a:ext cx="531719" cy="2191670"/>
+            <p:cNvPr id="48" name="rc48"/>
+            <p:cNvSpPr/>
+            <p:nvPr/>
+          </p:nvSpPr>
+          <p:spPr>
+            <a:xfrm>
+              <a:off x="3467142" y="3231248"/>
+              <a:ext cx="531719" cy="2228209"/>
             </a:xfrm>
             <a:prstGeom prst="rect">
               <a:avLst/>
@@ -3515,14 +4160,14 @@
         </p:sp>
         <p:sp>
           <p:nvSpPr>
-            <p:cNvPr id="34" name="rc34"/>
-            <p:cNvSpPr/>
-            <p:nvPr/>
-          </p:nvSpPr>
-          <p:spPr>
-            <a:xfrm>
-              <a:off x="3998862" y="3021803"/>
-              <a:ext cx="531719" cy="2400401"/>
+            <p:cNvPr id="49" name="rc49"/>
+            <p:cNvSpPr/>
+            <p:nvPr/>
+          </p:nvSpPr>
+          <p:spPr>
+            <a:xfrm>
+              <a:off x="3998862" y="3019038"/>
+              <a:ext cx="531719" cy="2440420"/>
             </a:xfrm>
             <a:prstGeom prst="rect">
               <a:avLst/>
@@ -3550,14 +4195,14 @@
         </p:sp>
         <p:sp>
           <p:nvSpPr>
-            <p:cNvPr id="35" name="rc35"/>
-            <p:cNvSpPr/>
-            <p:nvPr/>
-          </p:nvSpPr>
-          <p:spPr>
-            <a:xfrm>
-              <a:off x="4530581" y="2395611"/>
-              <a:ext cx="531719" cy="3026593"/>
+            <p:cNvPr id="50" name="rc50"/>
+            <p:cNvSpPr/>
+            <p:nvPr/>
+          </p:nvSpPr>
+          <p:spPr>
+            <a:xfrm>
+              <a:off x="4530581" y="2382407"/>
+              <a:ext cx="531719" cy="3077051"/>
             </a:xfrm>
             <a:prstGeom prst="rect">
               <a:avLst/>
@@ -3585,14 +4230,14 @@
         </p:sp>
         <p:sp>
           <p:nvSpPr>
-            <p:cNvPr id="36" name="rc36"/>
-            <p:cNvSpPr/>
-            <p:nvPr/>
-          </p:nvSpPr>
-          <p:spPr>
-            <a:xfrm>
-              <a:off x="5062300" y="3752360"/>
-              <a:ext cx="531719" cy="1669844"/>
+            <p:cNvPr id="51" name="rc51"/>
+            <p:cNvSpPr/>
+            <p:nvPr/>
+          </p:nvSpPr>
+          <p:spPr>
+            <a:xfrm>
+              <a:off x="5062300" y="3761775"/>
+              <a:ext cx="531719" cy="1697683"/>
             </a:xfrm>
             <a:prstGeom prst="rect">
               <a:avLst/>
@@ -3620,14 +4265,14 @@
         </p:sp>
         <p:sp>
           <p:nvSpPr>
-            <p:cNvPr id="37" name="rc37"/>
-            <p:cNvSpPr/>
-            <p:nvPr/>
-          </p:nvSpPr>
-          <p:spPr>
-            <a:xfrm>
-              <a:off x="5594019" y="5109109"/>
-              <a:ext cx="531719" cy="313095"/>
+            <p:cNvPr id="52" name="rc52"/>
+            <p:cNvSpPr/>
+            <p:nvPr/>
+          </p:nvSpPr>
+          <p:spPr>
+            <a:xfrm>
+              <a:off x="5594019" y="5141142"/>
+              <a:ext cx="531719" cy="318315"/>
             </a:xfrm>
             <a:prstGeom prst="rect">
               <a:avLst/>
@@ -3655,14 +4300,14 @@
         </p:sp>
         <p:sp>
           <p:nvSpPr>
-            <p:cNvPr id="38" name="rc38"/>
-            <p:cNvSpPr/>
-            <p:nvPr/>
-          </p:nvSpPr>
-          <p:spPr>
-            <a:xfrm>
-              <a:off x="6125738" y="4691648"/>
-              <a:ext cx="531719" cy="730556"/>
+            <p:cNvPr id="53" name="rc53"/>
+            <p:cNvSpPr/>
+            <p:nvPr/>
+          </p:nvSpPr>
+          <p:spPr>
+            <a:xfrm>
+              <a:off x="6125738" y="4716722"/>
+              <a:ext cx="531719" cy="742736"/>
             </a:xfrm>
             <a:prstGeom prst="rect">
               <a:avLst/>
@@ -3690,14 +4335,14 @@
         </p:sp>
         <p:sp>
           <p:nvSpPr>
-            <p:cNvPr id="39" name="rc39"/>
-            <p:cNvSpPr/>
-            <p:nvPr/>
-          </p:nvSpPr>
-          <p:spPr>
-            <a:xfrm>
-              <a:off x="6657457" y="5213474"/>
-              <a:ext cx="531719" cy="208730"/>
+            <p:cNvPr id="54" name="rc54"/>
+            <p:cNvSpPr/>
+            <p:nvPr/>
+          </p:nvSpPr>
+          <p:spPr>
+            <a:xfrm>
+              <a:off x="6657457" y="5247248"/>
+              <a:ext cx="531719" cy="212210"/>
             </a:xfrm>
             <a:prstGeom prst="rect">
               <a:avLst/>
@@ -3725,14 +4370,14 @@
         </p:sp>
         <p:sp>
           <p:nvSpPr>
-            <p:cNvPr id="40" name="rc40"/>
-            <p:cNvSpPr/>
-            <p:nvPr/>
-          </p:nvSpPr>
-          <p:spPr>
-            <a:xfrm>
-              <a:off x="7189176" y="5317839"/>
-              <a:ext cx="531719" cy="104365"/>
+            <p:cNvPr id="55" name="rc55"/>
+            <p:cNvSpPr/>
+            <p:nvPr/>
+          </p:nvSpPr>
+          <p:spPr>
+            <a:xfrm>
+              <a:off x="7189176" y="5353353"/>
+              <a:ext cx="531719" cy="106105"/>
             </a:xfrm>
             <a:prstGeom prst="rect">
               <a:avLst/>
@@ -3760,14 +4405,14 @@
         </p:sp>
         <p:sp>
           <p:nvSpPr>
-            <p:cNvPr id="41" name="rc41"/>
-            <p:cNvSpPr/>
-            <p:nvPr/>
-          </p:nvSpPr>
-          <p:spPr>
-            <a:xfrm>
-              <a:off x="7720895" y="5317839"/>
-              <a:ext cx="531719" cy="104365"/>
+            <p:cNvPr id="56" name="rc56"/>
+            <p:cNvSpPr/>
+            <p:nvPr/>
+          </p:nvSpPr>
+          <p:spPr>
+            <a:xfrm>
+              <a:off x="7720895" y="5353353"/>
+              <a:ext cx="531719" cy="106105"/>
             </a:xfrm>
             <a:prstGeom prst="rect">
               <a:avLst/>
@@ -3795,21 +4440,21 @@
         </p:sp>
         <p:sp>
           <p:nvSpPr>
-            <p:cNvPr id="42" name="pl42"/>
-            <p:cNvSpPr/>
-            <p:nvPr/>
-          </p:nvSpPr>
-          <p:spPr>
-            <a:xfrm>
-              <a:off x="4530581" y="2244282"/>
-              <a:ext cx="0" cy="3329252"/>
+            <p:cNvPr id="57" name="pl57"/>
+            <p:cNvSpPr/>
+            <p:nvPr/>
+          </p:nvSpPr>
+          <p:spPr>
+            <a:xfrm>
+              <a:off x="3998862" y="2228554"/>
+              <a:ext cx="0" cy="3384756"/>
             </a:xfrm>
             <a:custGeom>
               <a:avLst/>
               <a:pathLst>
-                <a:path w="0" h="3329252">
+                <a:path w="0" h="3384756">
                   <a:moveTo>
-                    <a:pt x="0" y="3329252"/>
+                    <a:pt x="0" y="3384756"/>
                   </a:moveTo>
                   <a:lnTo>
                     <a:pt x="0" y="0"/>
@@ -3820,7 +4465,7 @@
                 </a:path>
               </a:pathLst>
             </a:custGeom>
-            <a:ln w="13550" cap="flat">
+            <a:ln w="29811" cap="flat">
               <a:solidFill>
                 <a:srgbClr val="FF0000">
                   <a:alpha val="100000"/>
@@ -3838,13 +4483,13 @@
         </p:sp>
         <p:sp>
           <p:nvSpPr>
-            <p:cNvPr id="43" name="tx43"/>
-            <p:cNvSpPr/>
-            <p:nvPr/>
-          </p:nvSpPr>
-          <p:spPr>
-            <a:xfrm>
-              <a:off x="835933" y="5371227"/>
+            <p:cNvPr id="58" name="tx58"/>
+            <p:cNvSpPr/>
+            <p:nvPr/>
+          </p:nvSpPr>
+          <p:spPr>
+            <a:xfrm>
+              <a:off x="835933" y="5408480"/>
               <a:ext cx="79004" cy="101955"/>
             </a:xfrm>
             <a:prstGeom prst="rect">
@@ -3884,13 +4529,13 @@
         </p:sp>
         <p:sp>
           <p:nvSpPr>
-            <p:cNvPr id="44" name="tx44"/>
-            <p:cNvSpPr/>
-            <p:nvPr/>
-          </p:nvSpPr>
-          <p:spPr>
-            <a:xfrm>
-              <a:off x="835933" y="4739817"/>
+            <p:cNvPr id="59" name="tx59"/>
+            <p:cNvSpPr/>
+            <p:nvPr/>
+          </p:nvSpPr>
+          <p:spPr>
+            <a:xfrm>
+              <a:off x="835933" y="4766544"/>
               <a:ext cx="79004" cy="101955"/>
             </a:xfrm>
             <a:prstGeom prst="rect">
@@ -3930,13 +4575,13 @@
         </p:sp>
         <p:sp>
           <p:nvSpPr>
-            <p:cNvPr id="45" name="tx45"/>
-            <p:cNvSpPr/>
-            <p:nvPr/>
-          </p:nvSpPr>
-          <p:spPr>
-            <a:xfrm>
-              <a:off x="756929" y="4108407"/>
+            <p:cNvPr id="60" name="tx60"/>
+            <p:cNvSpPr/>
+            <p:nvPr/>
+          </p:nvSpPr>
+          <p:spPr>
+            <a:xfrm>
+              <a:off x="756929" y="4124607"/>
               <a:ext cx="158008" cy="101955"/>
             </a:xfrm>
             <a:prstGeom prst="rect">
@@ -3976,13 +4621,13 @@
         </p:sp>
         <p:sp>
           <p:nvSpPr>
-            <p:cNvPr id="46" name="tx46"/>
-            <p:cNvSpPr/>
-            <p:nvPr/>
-          </p:nvSpPr>
-          <p:spPr>
-            <a:xfrm>
-              <a:off x="756929" y="3476997"/>
+            <p:cNvPr id="61" name="tx61"/>
+            <p:cNvSpPr/>
+            <p:nvPr/>
+          </p:nvSpPr>
+          <p:spPr>
+            <a:xfrm>
+              <a:off x="756929" y="3482671"/>
               <a:ext cx="158008" cy="101955"/>
             </a:xfrm>
             <a:prstGeom prst="rect">
@@ -4022,13 +4667,13 @@
         </p:sp>
         <p:sp>
           <p:nvSpPr>
-            <p:cNvPr id="47" name="tx47"/>
-            <p:cNvSpPr/>
-            <p:nvPr/>
-          </p:nvSpPr>
-          <p:spPr>
-            <a:xfrm>
-              <a:off x="756929" y="2845587"/>
+            <p:cNvPr id="62" name="tx62"/>
+            <p:cNvSpPr/>
+            <p:nvPr/>
+          </p:nvSpPr>
+          <p:spPr>
+            <a:xfrm>
+              <a:off x="756929" y="2840734"/>
               <a:ext cx="158008" cy="101955"/>
             </a:xfrm>
             <a:prstGeom prst="rect">
@@ -4068,13 +4713,13 @@
         </p:sp>
         <p:sp>
           <p:nvSpPr>
-            <p:cNvPr id="48" name="tx48"/>
-            <p:cNvSpPr/>
-            <p:nvPr/>
-          </p:nvSpPr>
-          <p:spPr>
-            <a:xfrm>
-              <a:off x="756929" y="2214177"/>
+            <p:cNvPr id="63" name="tx63"/>
+            <p:cNvSpPr/>
+            <p:nvPr/>
+          </p:nvSpPr>
+          <p:spPr>
+            <a:xfrm>
+              <a:off x="756929" y="2198797"/>
               <a:ext cx="158008" cy="101955"/>
             </a:xfrm>
             <a:prstGeom prst="rect">
@@ -4114,14 +4759,14 @@
         </p:sp>
         <p:sp>
           <p:nvSpPr>
-            <p:cNvPr id="49" name="tx49"/>
-            <p:cNvSpPr/>
-            <p:nvPr/>
-          </p:nvSpPr>
-          <p:spPr>
-            <a:xfrm>
-              <a:off x="1217874" y="5653245"/>
-              <a:ext cx="244784" cy="101955"/>
+            <p:cNvPr id="64" name="tx64"/>
+            <p:cNvSpPr/>
+            <p:nvPr/>
+          </p:nvSpPr>
+          <p:spPr>
+            <a:xfrm>
+              <a:off x="1237625" y="5693022"/>
+              <a:ext cx="205282" cy="101955"/>
             </a:xfrm>
             <a:prstGeom prst="rect">
               <a:avLst/>
@@ -4153,21 +4798,21 @@
                   <a:latin typeface="Helvetica"/>
                   <a:cs typeface="Helvetica"/>
                 </a:rPr>
-                <a:t>-0.6</a:t>
+                <a:t>-60</a:t>
               </a:r>
             </a:p>
           </p:txBody>
         </p:sp>
         <p:sp>
           <p:nvSpPr>
-            <p:cNvPr id="50" name="tx50"/>
-            <p:cNvSpPr/>
-            <p:nvPr/>
-          </p:nvSpPr>
-          <p:spPr>
-            <a:xfrm>
-              <a:off x="2281312" y="5653245"/>
-              <a:ext cx="244784" cy="101955"/>
+            <p:cNvPr id="65" name="tx65"/>
+            <p:cNvSpPr/>
+            <p:nvPr/>
+          </p:nvSpPr>
+          <p:spPr>
+            <a:xfrm>
+              <a:off x="1769344" y="5693022"/>
+              <a:ext cx="205282" cy="101955"/>
             </a:xfrm>
             <a:prstGeom prst="rect">
               <a:avLst/>
@@ -4199,21 +4844,21 @@
                   <a:latin typeface="Helvetica"/>
                   <a:cs typeface="Helvetica"/>
                 </a:rPr>
-                <a:t>-0.4</a:t>
+                <a:t>-50</a:t>
               </a:r>
             </a:p>
           </p:txBody>
         </p:sp>
         <p:sp>
           <p:nvSpPr>
-            <p:cNvPr id="51" name="tx51"/>
-            <p:cNvSpPr/>
-            <p:nvPr/>
-          </p:nvSpPr>
-          <p:spPr>
-            <a:xfrm>
-              <a:off x="3344750" y="5653245"/>
-              <a:ext cx="244784" cy="101955"/>
+            <p:cNvPr id="66" name="tx66"/>
+            <p:cNvSpPr/>
+            <p:nvPr/>
+          </p:nvSpPr>
+          <p:spPr>
+            <a:xfrm>
+              <a:off x="2301063" y="5693022"/>
+              <a:ext cx="205282" cy="101955"/>
             </a:xfrm>
             <a:prstGeom prst="rect">
               <a:avLst/>
@@ -4245,21 +4890,21 @@
                   <a:latin typeface="Helvetica"/>
                   <a:cs typeface="Helvetica"/>
                 </a:rPr>
-                <a:t>-0.2</a:t>
+                <a:t>-40</a:t>
               </a:r>
             </a:p>
           </p:txBody>
         </p:sp>
         <p:sp>
           <p:nvSpPr>
-            <p:cNvPr id="52" name="tx52"/>
-            <p:cNvSpPr/>
-            <p:nvPr/>
-          </p:nvSpPr>
-          <p:spPr>
-            <a:xfrm>
-              <a:off x="4431825" y="5653245"/>
-              <a:ext cx="197510" cy="101955"/>
+            <p:cNvPr id="67" name="tx67"/>
+            <p:cNvSpPr/>
+            <p:nvPr/>
+          </p:nvSpPr>
+          <p:spPr>
+            <a:xfrm>
+              <a:off x="2832782" y="5693022"/>
+              <a:ext cx="205282" cy="101955"/>
             </a:xfrm>
             <a:prstGeom prst="rect">
               <a:avLst/>
@@ -4291,21 +4936,21 @@
                   <a:latin typeface="Helvetica"/>
                   <a:cs typeface="Helvetica"/>
                 </a:rPr>
-                <a:t>0.0</a:t>
+                <a:t>-30</a:t>
               </a:r>
             </a:p>
           </p:txBody>
         </p:sp>
         <p:sp>
           <p:nvSpPr>
-            <p:cNvPr id="53" name="tx53"/>
-            <p:cNvSpPr/>
-            <p:nvPr/>
-          </p:nvSpPr>
-          <p:spPr>
-            <a:xfrm>
-              <a:off x="5495264" y="5653245"/>
-              <a:ext cx="197510" cy="101955"/>
+            <p:cNvPr id="68" name="tx68"/>
+            <p:cNvSpPr/>
+            <p:nvPr/>
+          </p:nvSpPr>
+          <p:spPr>
+            <a:xfrm>
+              <a:off x="3364501" y="5693022"/>
+              <a:ext cx="205282" cy="101955"/>
             </a:xfrm>
             <a:prstGeom prst="rect">
               <a:avLst/>
@@ -4337,21 +4982,21 @@
                   <a:latin typeface="Helvetica"/>
                   <a:cs typeface="Helvetica"/>
                 </a:rPr>
-                <a:t>0.2</a:t>
+                <a:t>-20</a:t>
               </a:r>
             </a:p>
           </p:txBody>
         </p:sp>
         <p:sp>
           <p:nvSpPr>
-            <p:cNvPr id="54" name="tx54"/>
-            <p:cNvSpPr/>
-            <p:nvPr/>
-          </p:nvSpPr>
-          <p:spPr>
-            <a:xfrm>
-              <a:off x="6558702" y="5653245"/>
-              <a:ext cx="197510" cy="101955"/>
+            <p:cNvPr id="69" name="tx69"/>
+            <p:cNvSpPr/>
+            <p:nvPr/>
+          </p:nvSpPr>
+          <p:spPr>
+            <a:xfrm>
+              <a:off x="3896220" y="5693022"/>
+              <a:ext cx="205282" cy="101955"/>
             </a:xfrm>
             <a:prstGeom prst="rect">
               <a:avLst/>
@@ -4383,21 +5028,21 @@
                   <a:latin typeface="Helvetica"/>
                   <a:cs typeface="Helvetica"/>
                 </a:rPr>
-                <a:t>0.4</a:t>
+                <a:t>-10</a:t>
               </a:r>
             </a:p>
           </p:txBody>
         </p:sp>
         <p:sp>
           <p:nvSpPr>
-            <p:cNvPr id="55" name="tx55"/>
-            <p:cNvSpPr/>
-            <p:nvPr/>
-          </p:nvSpPr>
-          <p:spPr>
-            <a:xfrm>
-              <a:off x="7622140" y="5653245"/>
-              <a:ext cx="197510" cy="101955"/>
+            <p:cNvPr id="70" name="tx70"/>
+            <p:cNvSpPr/>
+            <p:nvPr/>
+          </p:nvSpPr>
+          <p:spPr>
+            <a:xfrm>
+              <a:off x="4491079" y="5693022"/>
+              <a:ext cx="79004" cy="101955"/>
             </a:xfrm>
             <a:prstGeom prst="rect">
               <a:avLst/>
@@ -4429,21 +5074,343 @@
                   <a:latin typeface="Helvetica"/>
                   <a:cs typeface="Helvetica"/>
                 </a:rPr>
-                <a:t>0.6</a:t>
+                <a:t>0</a:t>
               </a:r>
             </a:p>
           </p:txBody>
         </p:sp>
         <p:sp>
           <p:nvSpPr>
-            <p:cNvPr id="56" name="tx56"/>
-            <p:cNvSpPr/>
-            <p:nvPr/>
-          </p:nvSpPr>
-          <p:spPr>
-            <a:xfrm>
-              <a:off x="2070934" y="5834415"/>
-              <a:ext cx="2138873" cy="127558"/>
+            <p:cNvPr id="71" name="tx71"/>
+            <p:cNvSpPr/>
+            <p:nvPr/>
+          </p:nvSpPr>
+          <p:spPr>
+            <a:xfrm>
+              <a:off x="4983296" y="5693022"/>
+              <a:ext cx="158008" cy="101955"/>
+            </a:xfrm>
+            <a:prstGeom prst="rect">
+              <a:avLst/>
+            </a:prstGeom>
+            <a:noFill/>
+          </p:spPr>
+          <p:txBody>
+            <a:bodyPr lIns="0" rIns="0" tIns="0" bIns="0" anchorCtr="1" anchor="ctr" wrap="none"/>
+            <a:lstStyle/>
+            <a:p>
+              <a:pPr algn="l" marL="0" marR="0" indent="0">
+                <a:lnSpc>
+                  <a:spcPts val="1120"/>
+                </a:lnSpc>
+                <a:spcBef>
+                  <a:spcPts val="0"/>
+                </a:spcBef>
+                <a:spcAft>
+                  <a:spcPts val="0"/>
+                </a:spcAft>
+              </a:pPr>
+              <a:r>
+                <a:rPr sz="1120">
+                  <a:solidFill>
+                    <a:srgbClr val="4D4D4D">
+                      <a:alpha val="100000"/>
+                    </a:srgbClr>
+                  </a:solidFill>
+                  <a:latin typeface="Helvetica"/>
+                  <a:cs typeface="Helvetica"/>
+                </a:rPr>
+                <a:t>10</a:t>
+              </a:r>
+            </a:p>
+          </p:txBody>
+        </p:sp>
+        <p:sp>
+          <p:nvSpPr>
+            <p:cNvPr id="72" name="tx72"/>
+            <p:cNvSpPr/>
+            <p:nvPr/>
+          </p:nvSpPr>
+          <p:spPr>
+            <a:xfrm>
+              <a:off x="5515015" y="5693022"/>
+              <a:ext cx="158008" cy="101955"/>
+            </a:xfrm>
+            <a:prstGeom prst="rect">
+              <a:avLst/>
+            </a:prstGeom>
+            <a:noFill/>
+          </p:spPr>
+          <p:txBody>
+            <a:bodyPr lIns="0" rIns="0" tIns="0" bIns="0" anchorCtr="1" anchor="ctr" wrap="none"/>
+            <a:lstStyle/>
+            <a:p>
+              <a:pPr algn="l" marL="0" marR="0" indent="0">
+                <a:lnSpc>
+                  <a:spcPts val="1120"/>
+                </a:lnSpc>
+                <a:spcBef>
+                  <a:spcPts val="0"/>
+                </a:spcBef>
+                <a:spcAft>
+                  <a:spcPts val="0"/>
+                </a:spcAft>
+              </a:pPr>
+              <a:r>
+                <a:rPr sz="1120">
+                  <a:solidFill>
+                    <a:srgbClr val="4D4D4D">
+                      <a:alpha val="100000"/>
+                    </a:srgbClr>
+                  </a:solidFill>
+                  <a:latin typeface="Helvetica"/>
+                  <a:cs typeface="Helvetica"/>
+                </a:rPr>
+                <a:t>20</a:t>
+              </a:r>
+            </a:p>
+          </p:txBody>
+        </p:sp>
+        <p:sp>
+          <p:nvSpPr>
+            <p:cNvPr id="73" name="tx73"/>
+            <p:cNvSpPr/>
+            <p:nvPr/>
+          </p:nvSpPr>
+          <p:spPr>
+            <a:xfrm>
+              <a:off x="6046734" y="5693022"/>
+              <a:ext cx="158008" cy="101955"/>
+            </a:xfrm>
+            <a:prstGeom prst="rect">
+              <a:avLst/>
+            </a:prstGeom>
+            <a:noFill/>
+          </p:spPr>
+          <p:txBody>
+            <a:bodyPr lIns="0" rIns="0" tIns="0" bIns="0" anchorCtr="1" anchor="ctr" wrap="none"/>
+            <a:lstStyle/>
+            <a:p>
+              <a:pPr algn="l" marL="0" marR="0" indent="0">
+                <a:lnSpc>
+                  <a:spcPts val="1120"/>
+                </a:lnSpc>
+                <a:spcBef>
+                  <a:spcPts val="0"/>
+                </a:spcBef>
+                <a:spcAft>
+                  <a:spcPts val="0"/>
+                </a:spcAft>
+              </a:pPr>
+              <a:r>
+                <a:rPr sz="1120">
+                  <a:solidFill>
+                    <a:srgbClr val="4D4D4D">
+                      <a:alpha val="100000"/>
+                    </a:srgbClr>
+                  </a:solidFill>
+                  <a:latin typeface="Helvetica"/>
+                  <a:cs typeface="Helvetica"/>
+                </a:rPr>
+                <a:t>30</a:t>
+              </a:r>
+            </a:p>
+          </p:txBody>
+        </p:sp>
+        <p:sp>
+          <p:nvSpPr>
+            <p:cNvPr id="74" name="tx74"/>
+            <p:cNvSpPr/>
+            <p:nvPr/>
+          </p:nvSpPr>
+          <p:spPr>
+            <a:xfrm>
+              <a:off x="6578453" y="5693022"/>
+              <a:ext cx="158008" cy="101955"/>
+            </a:xfrm>
+            <a:prstGeom prst="rect">
+              <a:avLst/>
+            </a:prstGeom>
+            <a:noFill/>
+          </p:spPr>
+          <p:txBody>
+            <a:bodyPr lIns="0" rIns="0" tIns="0" bIns="0" anchorCtr="1" anchor="ctr" wrap="none"/>
+            <a:lstStyle/>
+            <a:p>
+              <a:pPr algn="l" marL="0" marR="0" indent="0">
+                <a:lnSpc>
+                  <a:spcPts val="1120"/>
+                </a:lnSpc>
+                <a:spcBef>
+                  <a:spcPts val="0"/>
+                </a:spcBef>
+                <a:spcAft>
+                  <a:spcPts val="0"/>
+                </a:spcAft>
+              </a:pPr>
+              <a:r>
+                <a:rPr sz="1120">
+                  <a:solidFill>
+                    <a:srgbClr val="4D4D4D">
+                      <a:alpha val="100000"/>
+                    </a:srgbClr>
+                  </a:solidFill>
+                  <a:latin typeface="Helvetica"/>
+                  <a:cs typeface="Helvetica"/>
+                </a:rPr>
+                <a:t>40</a:t>
+              </a:r>
+            </a:p>
+          </p:txBody>
+        </p:sp>
+        <p:sp>
+          <p:nvSpPr>
+            <p:cNvPr id="75" name="tx75"/>
+            <p:cNvSpPr/>
+            <p:nvPr/>
+          </p:nvSpPr>
+          <p:spPr>
+            <a:xfrm>
+              <a:off x="7110172" y="5693022"/>
+              <a:ext cx="158008" cy="101955"/>
+            </a:xfrm>
+            <a:prstGeom prst="rect">
+              <a:avLst/>
+            </a:prstGeom>
+            <a:noFill/>
+          </p:spPr>
+          <p:txBody>
+            <a:bodyPr lIns="0" rIns="0" tIns="0" bIns="0" anchorCtr="1" anchor="ctr" wrap="none"/>
+            <a:lstStyle/>
+            <a:p>
+              <a:pPr algn="l" marL="0" marR="0" indent="0">
+                <a:lnSpc>
+                  <a:spcPts val="1120"/>
+                </a:lnSpc>
+                <a:spcBef>
+                  <a:spcPts val="0"/>
+                </a:spcBef>
+                <a:spcAft>
+                  <a:spcPts val="0"/>
+                </a:spcAft>
+              </a:pPr>
+              <a:r>
+                <a:rPr sz="1120">
+                  <a:solidFill>
+                    <a:srgbClr val="4D4D4D">
+                      <a:alpha val="100000"/>
+                    </a:srgbClr>
+                  </a:solidFill>
+                  <a:latin typeface="Helvetica"/>
+                  <a:cs typeface="Helvetica"/>
+                </a:rPr>
+                <a:t>50</a:t>
+              </a:r>
+            </a:p>
+          </p:txBody>
+        </p:sp>
+        <p:sp>
+          <p:nvSpPr>
+            <p:cNvPr id="76" name="tx76"/>
+            <p:cNvSpPr/>
+            <p:nvPr/>
+          </p:nvSpPr>
+          <p:spPr>
+            <a:xfrm>
+              <a:off x="7641891" y="5693022"/>
+              <a:ext cx="158008" cy="101955"/>
+            </a:xfrm>
+            <a:prstGeom prst="rect">
+              <a:avLst/>
+            </a:prstGeom>
+            <a:noFill/>
+          </p:spPr>
+          <p:txBody>
+            <a:bodyPr lIns="0" rIns="0" tIns="0" bIns="0" anchorCtr="1" anchor="ctr" wrap="none"/>
+            <a:lstStyle/>
+            <a:p>
+              <a:pPr algn="l" marL="0" marR="0" indent="0">
+                <a:lnSpc>
+                  <a:spcPts val="1120"/>
+                </a:lnSpc>
+                <a:spcBef>
+                  <a:spcPts val="0"/>
+                </a:spcBef>
+                <a:spcAft>
+                  <a:spcPts val="0"/>
+                </a:spcAft>
+              </a:pPr>
+              <a:r>
+                <a:rPr sz="1120">
+                  <a:solidFill>
+                    <a:srgbClr val="4D4D4D">
+                      <a:alpha val="100000"/>
+                    </a:srgbClr>
+                  </a:solidFill>
+                  <a:latin typeface="Helvetica"/>
+                  <a:cs typeface="Helvetica"/>
+                </a:rPr>
+                <a:t>60</a:t>
+              </a:r>
+            </a:p>
+          </p:txBody>
+        </p:sp>
+        <p:sp>
+          <p:nvSpPr>
+            <p:cNvPr id="77" name="tx77"/>
+            <p:cNvSpPr/>
+            <p:nvPr/>
+          </p:nvSpPr>
+          <p:spPr>
+            <a:xfrm>
+              <a:off x="8173610" y="5693022"/>
+              <a:ext cx="158008" cy="101955"/>
+            </a:xfrm>
+            <a:prstGeom prst="rect">
+              <a:avLst/>
+            </a:prstGeom>
+            <a:noFill/>
+          </p:spPr>
+          <p:txBody>
+            <a:bodyPr lIns="0" rIns="0" tIns="0" bIns="0" anchorCtr="1" anchor="ctr" wrap="none"/>
+            <a:lstStyle/>
+            <a:p>
+              <a:pPr algn="l" marL="0" marR="0" indent="0">
+                <a:lnSpc>
+                  <a:spcPts val="1120"/>
+                </a:lnSpc>
+                <a:spcBef>
+                  <a:spcPts val="0"/>
+                </a:spcBef>
+                <a:spcAft>
+                  <a:spcPts val="0"/>
+                </a:spcAft>
+              </a:pPr>
+              <a:r>
+                <a:rPr sz="1120">
+                  <a:solidFill>
+                    <a:srgbClr val="4D4D4D">
+                      <a:alpha val="100000"/>
+                    </a:srgbClr>
+                  </a:solidFill>
+                  <a:latin typeface="Helvetica"/>
+                  <a:cs typeface="Helvetica"/>
+                </a:rPr>
+                <a:t>70</a:t>
+              </a:r>
+            </a:p>
+          </p:txBody>
+        </p:sp>
+        <p:sp>
+          <p:nvSpPr>
+            <p:cNvPr id="78" name="tx78"/>
+            <p:cNvSpPr/>
+            <p:nvPr/>
+          </p:nvSpPr>
+          <p:spPr>
+            <a:xfrm>
+              <a:off x="3981390" y="5870717"/>
+              <a:ext cx="1630100" cy="127558"/>
             </a:xfrm>
             <a:prstGeom prst="rect">
               <a:avLst/>
@@ -4475,618 +5442,20 @@
                   <a:latin typeface="Helvetica"/>
                   <a:cs typeface="Helvetica"/>
                 </a:rPr>
-                <a:t>eGFR difference  =  (eGFR</a:t>
+                <a:t>eGFR difference (%)</a:t>
               </a:r>
             </a:p>
           </p:txBody>
         </p:sp>
         <p:sp>
           <p:nvSpPr>
-            <p:cNvPr id="57" name="tx57"/>
-            <p:cNvSpPr/>
-            <p:nvPr/>
-          </p:nvSpPr>
-          <p:spPr>
-            <a:xfrm>
-              <a:off x="4209807" y="5905308"/>
-              <a:ext cx="89885" cy="89245"/>
-            </a:xfrm>
-            <a:prstGeom prst="rect">
-              <a:avLst/>
-            </a:prstGeom>
-            <a:noFill/>
-          </p:spPr>
-          <p:txBody>
-            <a:bodyPr lIns="0" rIns="0" tIns="0" bIns="0" anchorCtr="1" anchor="ctr" wrap="none"/>
-            <a:lstStyle/>
-            <a:p>
-              <a:pPr algn="l" marL="0" marR="0" indent="0">
-                <a:lnSpc>
-                  <a:spcPts val="979"/>
-                </a:lnSpc>
-                <a:spcBef>
-                  <a:spcPts val="0"/>
-                </a:spcBef>
-                <a:spcAft>
-                  <a:spcPts val="0"/>
-                </a:spcAft>
-              </a:pPr>
-              <a:r>
-                <a:rPr sz="979">
-                  <a:solidFill>
-                    <a:srgbClr val="000000">
-                      <a:alpha val="100000"/>
-                    </a:srgbClr>
-                  </a:solidFill>
-                  <a:latin typeface="Helvetica"/>
-                  <a:cs typeface="Helvetica"/>
-                </a:rPr>
-                <a:t>C</a:t>
-              </a:r>
-            </a:p>
-          </p:txBody>
-        </p:sp>
-        <p:sp>
-          <p:nvSpPr>
-            <p:cNvPr id="58" name="tx58"/>
-            <p:cNvSpPr/>
-            <p:nvPr/>
-          </p:nvSpPr>
-          <p:spPr>
-            <a:xfrm>
-              <a:off x="4299692" y="5905308"/>
-              <a:ext cx="89885" cy="89245"/>
-            </a:xfrm>
-            <a:prstGeom prst="rect">
-              <a:avLst/>
-            </a:prstGeom>
-            <a:noFill/>
-          </p:spPr>
-          <p:txBody>
-            <a:bodyPr lIns="0" rIns="0" tIns="0" bIns="0" anchorCtr="1" anchor="ctr" wrap="none"/>
-            <a:lstStyle/>
-            <a:p>
-              <a:pPr algn="l" marL="0" marR="0" indent="0">
-                <a:lnSpc>
-                  <a:spcPts val="979"/>
-                </a:lnSpc>
-                <a:spcBef>
-                  <a:spcPts val="0"/>
-                </a:spcBef>
-                <a:spcAft>
-                  <a:spcPts val="0"/>
-                </a:spcAft>
-              </a:pPr>
-              <a:r>
-                <a:rPr sz="979">
-                  <a:solidFill>
-                    <a:srgbClr val="000000">
-                      <a:alpha val="100000"/>
-                    </a:srgbClr>
-                  </a:solidFill>
-                  <a:latin typeface="Helvetica"/>
-                  <a:cs typeface="Helvetica"/>
-                </a:rPr>
-                <a:t>R</a:t>
-              </a:r>
-            </a:p>
-          </p:txBody>
-        </p:sp>
-        <p:sp>
-          <p:nvSpPr>
-            <p:cNvPr id="59" name="tx59"/>
-            <p:cNvSpPr/>
-            <p:nvPr/>
-          </p:nvSpPr>
-          <p:spPr>
-            <a:xfrm>
-              <a:off x="4389578" y="5884826"/>
-              <a:ext cx="68305" cy="109728"/>
-            </a:xfrm>
-            <a:prstGeom prst="rect">
-              <a:avLst/>
-            </a:prstGeom>
-            <a:noFill/>
-          </p:spPr>
-          <p:txBody>
-            <a:bodyPr lIns="0" rIns="0" tIns="0" bIns="0" anchorCtr="1" anchor="ctr" wrap="none"/>
-            <a:lstStyle/>
-            <a:p>
-              <a:pPr algn="l" marL="0" marR="0" indent="0">
-                <a:lnSpc>
-                  <a:spcPts val="979"/>
-                </a:lnSpc>
-                <a:spcBef>
-                  <a:spcPts val="0"/>
-                </a:spcBef>
-                <a:spcAft>
-                  <a:spcPts val="0"/>
-                </a:spcAft>
-              </a:pPr>
-              <a:r>
-                <a:rPr sz="979">
-                  <a:solidFill>
-                    <a:srgbClr val="000000">
-                      <a:alpha val="100000"/>
-                    </a:srgbClr>
-                  </a:solidFill>
-                  <a:latin typeface="Symbol"/>
-                  <a:cs typeface="Symbol"/>
-                </a:rPr>
-                <a:t>−</a:t>
-              </a:r>
-            </a:p>
-          </p:txBody>
-        </p:sp>
-        <p:sp>
-          <p:nvSpPr>
-            <p:cNvPr id="60" name="tx60"/>
-            <p:cNvSpPr/>
-            <p:nvPr/>
-          </p:nvSpPr>
-          <p:spPr>
-            <a:xfrm>
-              <a:off x="4457884" y="5905308"/>
-              <a:ext cx="89885" cy="89245"/>
-            </a:xfrm>
-            <a:prstGeom prst="rect">
-              <a:avLst/>
-            </a:prstGeom>
-            <a:noFill/>
-          </p:spPr>
-          <p:txBody>
-            <a:bodyPr lIns="0" rIns="0" tIns="0" bIns="0" anchorCtr="1" anchor="ctr" wrap="none"/>
-            <a:lstStyle/>
-            <a:p>
-              <a:pPr algn="l" marL="0" marR="0" indent="0">
-                <a:lnSpc>
-                  <a:spcPts val="979"/>
-                </a:lnSpc>
-                <a:spcBef>
-                  <a:spcPts val="0"/>
-                </a:spcBef>
-                <a:spcAft>
-                  <a:spcPts val="0"/>
-                </a:spcAft>
-              </a:pPr>
-              <a:r>
-                <a:rPr sz="979">
-                  <a:solidFill>
-                    <a:srgbClr val="000000">
-                      <a:alpha val="100000"/>
-                    </a:srgbClr>
-                  </a:solidFill>
-                  <a:latin typeface="Helvetica"/>
-                  <a:cs typeface="Helvetica"/>
-                </a:rPr>
-                <a:t>C</a:t>
-              </a:r>
-            </a:p>
-          </p:txBody>
-        </p:sp>
-        <p:sp>
-          <p:nvSpPr>
-            <p:cNvPr id="61" name="tx61"/>
-            <p:cNvSpPr/>
-            <p:nvPr/>
-          </p:nvSpPr>
-          <p:spPr>
-            <a:xfrm>
-              <a:off x="4547769" y="5905308"/>
-              <a:ext cx="83027" cy="89245"/>
-            </a:xfrm>
-            <a:prstGeom prst="rect">
-              <a:avLst/>
-            </a:prstGeom>
-            <a:noFill/>
-          </p:spPr>
-          <p:txBody>
-            <a:bodyPr lIns="0" rIns="0" tIns="0" bIns="0" anchorCtr="1" anchor="ctr" wrap="none"/>
-            <a:lstStyle/>
-            <a:p>
-              <a:pPr algn="l" marL="0" marR="0" indent="0">
-                <a:lnSpc>
-                  <a:spcPts val="979"/>
-                </a:lnSpc>
-                <a:spcBef>
-                  <a:spcPts val="0"/>
-                </a:spcBef>
-                <a:spcAft>
-                  <a:spcPts val="0"/>
-                </a:spcAft>
-              </a:pPr>
-              <a:r>
-                <a:rPr sz="979">
-                  <a:solidFill>
-                    <a:srgbClr val="000000">
-                      <a:alpha val="100000"/>
-                    </a:srgbClr>
-                  </a:solidFill>
-                  <a:latin typeface="Helvetica"/>
-                  <a:cs typeface="Helvetica"/>
-                </a:rPr>
-                <a:t>Y</a:t>
-              </a:r>
-            </a:p>
-          </p:txBody>
-        </p:sp>
-        <p:sp>
-          <p:nvSpPr>
-            <p:cNvPr id="62" name="tx62"/>
-            <p:cNvSpPr/>
-            <p:nvPr/>
-          </p:nvSpPr>
-          <p:spPr>
-            <a:xfrm>
-              <a:off x="4630797" y="5905308"/>
-              <a:ext cx="83027" cy="89245"/>
-            </a:xfrm>
-            <a:prstGeom prst="rect">
-              <a:avLst/>
-            </a:prstGeom>
-            <a:noFill/>
-          </p:spPr>
-          <p:txBody>
-            <a:bodyPr lIns="0" rIns="0" tIns="0" bIns="0" anchorCtr="1" anchor="ctr" wrap="none"/>
-            <a:lstStyle/>
-            <a:p>
-              <a:pPr algn="l" marL="0" marR="0" indent="0">
-                <a:lnSpc>
-                  <a:spcPts val="979"/>
-                </a:lnSpc>
-                <a:spcBef>
-                  <a:spcPts val="0"/>
-                </a:spcBef>
-                <a:spcAft>
-                  <a:spcPts val="0"/>
-                </a:spcAft>
-              </a:pPr>
-              <a:r>
-                <a:rPr sz="979">
-                  <a:solidFill>
-                    <a:srgbClr val="000000">
-                      <a:alpha val="100000"/>
-                    </a:srgbClr>
-                  </a:solidFill>
-                  <a:latin typeface="Helvetica"/>
-                  <a:cs typeface="Helvetica"/>
-                </a:rPr>
-                <a:t>S</a:t>
-              </a:r>
-            </a:p>
-          </p:txBody>
-        </p:sp>
-        <p:sp>
-          <p:nvSpPr>
-            <p:cNvPr id="63" name="tx63"/>
-            <p:cNvSpPr/>
-            <p:nvPr/>
-          </p:nvSpPr>
-          <p:spPr>
-            <a:xfrm>
-              <a:off x="4713824" y="5834415"/>
-              <a:ext cx="558149" cy="127558"/>
-            </a:xfrm>
-            <a:prstGeom prst="rect">
-              <a:avLst/>
-            </a:prstGeom>
-            <a:noFill/>
-          </p:spPr>
-          <p:txBody>
-            <a:bodyPr lIns="0" rIns="0" tIns="0" bIns="0" anchorCtr="1" anchor="ctr" wrap="none"/>
-            <a:lstStyle/>
-            <a:p>
-              <a:pPr algn="l" marL="0" marR="0" indent="0">
-                <a:lnSpc>
-                  <a:spcPts val="1400"/>
-                </a:lnSpc>
-                <a:spcBef>
-                  <a:spcPts val="0"/>
-                </a:spcBef>
-                <a:spcAft>
-                  <a:spcPts val="0"/>
-                </a:spcAft>
-              </a:pPr>
-              <a:r>
-                <a:rPr sz="1400">
-                  <a:solidFill>
-                    <a:srgbClr val="000000">
-                      <a:alpha val="100000"/>
-                    </a:srgbClr>
-                  </a:solidFill>
-                  <a:latin typeface="Helvetica"/>
-                  <a:cs typeface="Helvetica"/>
-                </a:rPr>
-                <a:t> − CrCl</a:t>
-              </a:r>
-            </a:p>
-          </p:txBody>
-        </p:sp>
-        <p:sp>
-          <p:nvSpPr>
-            <p:cNvPr id="64" name="tx64"/>
-            <p:cNvSpPr/>
-            <p:nvPr/>
-          </p:nvSpPr>
-          <p:spPr>
-            <a:xfrm>
-              <a:off x="5271974" y="5905308"/>
-              <a:ext cx="89885" cy="89245"/>
-            </a:xfrm>
-            <a:prstGeom prst="rect">
-              <a:avLst/>
-            </a:prstGeom>
-            <a:noFill/>
-          </p:spPr>
-          <p:txBody>
-            <a:bodyPr lIns="0" rIns="0" tIns="0" bIns="0" anchorCtr="1" anchor="ctr" wrap="none"/>
-            <a:lstStyle/>
-            <a:p>
-              <a:pPr algn="l" marL="0" marR="0" indent="0">
-                <a:lnSpc>
-                  <a:spcPts val="979"/>
-                </a:lnSpc>
-                <a:spcBef>
-                  <a:spcPts val="0"/>
-                </a:spcBef>
-                <a:spcAft>
-                  <a:spcPts val="0"/>
-                </a:spcAft>
-              </a:pPr>
-              <a:r>
-                <a:rPr sz="979">
-                  <a:solidFill>
-                    <a:srgbClr val="000000">
-                      <a:alpha val="100000"/>
-                    </a:srgbClr>
-                  </a:solidFill>
-                  <a:latin typeface="Helvetica"/>
-                  <a:cs typeface="Helvetica"/>
-                </a:rPr>
-                <a:t>C</a:t>
-              </a:r>
-            </a:p>
-          </p:txBody>
-        </p:sp>
-        <p:sp>
-          <p:nvSpPr>
-            <p:cNvPr id="65" name="tx65"/>
-            <p:cNvSpPr/>
-            <p:nvPr/>
-          </p:nvSpPr>
-          <p:spPr>
-            <a:xfrm>
-              <a:off x="5361859" y="5905308"/>
-              <a:ext cx="96743" cy="89245"/>
-            </a:xfrm>
-            <a:prstGeom prst="rect">
-              <a:avLst/>
-            </a:prstGeom>
-            <a:noFill/>
-          </p:spPr>
-          <p:txBody>
-            <a:bodyPr lIns="0" rIns="0" tIns="0" bIns="0" anchorCtr="1" anchor="ctr" wrap="none"/>
-            <a:lstStyle/>
-            <a:p>
-              <a:pPr algn="l" marL="0" marR="0" indent="0">
-                <a:lnSpc>
-                  <a:spcPts val="979"/>
-                </a:lnSpc>
-                <a:spcBef>
-                  <a:spcPts val="0"/>
-                </a:spcBef>
-                <a:spcAft>
-                  <a:spcPts val="0"/>
-                </a:spcAft>
-              </a:pPr>
-              <a:r>
-                <a:rPr sz="979">
-                  <a:solidFill>
-                    <a:srgbClr val="000000">
-                      <a:alpha val="100000"/>
-                    </a:srgbClr>
-                  </a:solidFill>
-                  <a:latin typeface="Helvetica"/>
-                  <a:cs typeface="Helvetica"/>
-                </a:rPr>
-                <a:t>G</a:t>
-              </a:r>
-            </a:p>
-          </p:txBody>
-        </p:sp>
-        <p:sp>
-          <p:nvSpPr>
-            <p:cNvPr id="66" name="tx66"/>
-            <p:cNvSpPr/>
-            <p:nvPr/>
-          </p:nvSpPr>
-          <p:spPr>
-            <a:xfrm>
-              <a:off x="5458603" y="5834415"/>
-              <a:ext cx="562904" cy="127558"/>
-            </a:xfrm>
-            <a:prstGeom prst="rect">
-              <a:avLst/>
-            </a:prstGeom>
-            <a:noFill/>
-          </p:spPr>
-          <p:txBody>
-            <a:bodyPr lIns="0" rIns="0" tIns="0" bIns="0" anchorCtr="1" anchor="ctr" wrap="none"/>
-            <a:lstStyle/>
-            <a:p>
-              <a:pPr algn="l" marL="0" marR="0" indent="0">
-                <a:lnSpc>
-                  <a:spcPts val="1400"/>
-                </a:lnSpc>
-                <a:spcBef>
-                  <a:spcPts val="0"/>
-                </a:spcBef>
-                <a:spcAft>
-                  <a:spcPts val="0"/>
-                </a:spcAft>
-              </a:pPr>
-              <a:r>
-                <a:rPr sz="1400">
-                  <a:solidFill>
-                    <a:srgbClr val="000000">
-                      <a:alpha val="100000"/>
-                    </a:srgbClr>
-                  </a:solidFill>
-                  <a:latin typeface="Helvetica"/>
-                  <a:cs typeface="Helvetica"/>
-                </a:rPr>
-                <a:t>) / CrCl</a:t>
-              </a:r>
-            </a:p>
-          </p:txBody>
-        </p:sp>
-        <p:sp>
-          <p:nvSpPr>
-            <p:cNvPr id="67" name="tx67"/>
-            <p:cNvSpPr/>
-            <p:nvPr/>
-          </p:nvSpPr>
-          <p:spPr>
-            <a:xfrm>
-              <a:off x="6021508" y="5905308"/>
-              <a:ext cx="89885" cy="89245"/>
-            </a:xfrm>
-            <a:prstGeom prst="rect">
-              <a:avLst/>
-            </a:prstGeom>
-            <a:noFill/>
-          </p:spPr>
-          <p:txBody>
-            <a:bodyPr lIns="0" rIns="0" tIns="0" bIns="0" anchorCtr="1" anchor="ctr" wrap="none"/>
-            <a:lstStyle/>
-            <a:p>
-              <a:pPr algn="l" marL="0" marR="0" indent="0">
-                <a:lnSpc>
-                  <a:spcPts val="979"/>
-                </a:lnSpc>
-                <a:spcBef>
-                  <a:spcPts val="0"/>
-                </a:spcBef>
-                <a:spcAft>
-                  <a:spcPts val="0"/>
-                </a:spcAft>
-              </a:pPr>
-              <a:r>
-                <a:rPr sz="979">
-                  <a:solidFill>
-                    <a:srgbClr val="000000">
-                      <a:alpha val="100000"/>
-                    </a:srgbClr>
-                  </a:solidFill>
-                  <a:latin typeface="Helvetica"/>
-                  <a:cs typeface="Helvetica"/>
-                </a:rPr>
-                <a:t>C</a:t>
-              </a:r>
-            </a:p>
-          </p:txBody>
-        </p:sp>
-        <p:sp>
-          <p:nvSpPr>
-            <p:cNvPr id="68" name="tx68"/>
-            <p:cNvSpPr/>
-            <p:nvPr/>
-          </p:nvSpPr>
-          <p:spPr>
-            <a:xfrm>
-              <a:off x="6111393" y="5905308"/>
-              <a:ext cx="96743" cy="89245"/>
-            </a:xfrm>
-            <a:prstGeom prst="rect">
-              <a:avLst/>
-            </a:prstGeom>
-            <a:noFill/>
-          </p:spPr>
-          <p:txBody>
-            <a:bodyPr lIns="0" rIns="0" tIns="0" bIns="0" anchorCtr="1" anchor="ctr" wrap="none"/>
-            <a:lstStyle/>
-            <a:p>
-              <a:pPr algn="l" marL="0" marR="0" indent="0">
-                <a:lnSpc>
-                  <a:spcPts val="979"/>
-                </a:lnSpc>
-                <a:spcBef>
-                  <a:spcPts val="0"/>
-                </a:spcBef>
-                <a:spcAft>
-                  <a:spcPts val="0"/>
-                </a:spcAft>
-              </a:pPr>
-              <a:r>
-                <a:rPr sz="979">
-                  <a:solidFill>
-                    <a:srgbClr val="000000">
-                      <a:alpha val="100000"/>
-                    </a:srgbClr>
-                  </a:solidFill>
-                  <a:latin typeface="Helvetica"/>
-                  <a:cs typeface="Helvetica"/>
-                </a:rPr>
-                <a:t>G</a:t>
-              </a:r>
-            </a:p>
-          </p:txBody>
-        </p:sp>
-        <p:sp>
-          <p:nvSpPr>
-            <p:cNvPr id="69" name="tx69"/>
-            <p:cNvSpPr/>
-            <p:nvPr/>
-          </p:nvSpPr>
-          <p:spPr>
-            <a:xfrm>
-              <a:off x="6208137" y="5834415"/>
-              <a:ext cx="1313809" cy="127558"/>
-            </a:xfrm>
-            <a:prstGeom prst="rect">
-              <a:avLst/>
-            </a:prstGeom>
-            <a:noFill/>
-          </p:spPr>
-          <p:txBody>
-            <a:bodyPr lIns="0" rIns="0" tIns="0" bIns="0" anchorCtr="1" anchor="ctr" wrap="none"/>
-            <a:lstStyle/>
-            <a:p>
-              <a:pPr algn="l" marL="0" marR="0" indent="0">
-                <a:lnSpc>
-                  <a:spcPts val="1400"/>
-                </a:lnSpc>
-                <a:spcBef>
-                  <a:spcPts val="0"/>
-                </a:spcBef>
-                <a:spcAft>
-                  <a:spcPts val="0"/>
-                </a:spcAft>
-              </a:pPr>
-              <a:r>
-                <a:rPr sz="1400">
-                  <a:solidFill>
-                    <a:srgbClr val="000000">
-                      <a:alpha val="100000"/>
-                    </a:srgbClr>
-                  </a:solidFill>
-                  <a:latin typeface="Helvetica"/>
-                  <a:cs typeface="Helvetica"/>
-                </a:rPr>
-                <a:t>   (mL/min basis)</a:t>
-              </a:r>
-            </a:p>
-          </p:txBody>
-        </p:sp>
-        <p:sp>
-          <p:nvSpPr>
-            <p:cNvPr id="70" name="tx70"/>
+            <p:cNvPr id="79" name="tx79"/>
             <p:cNvSpPr/>
             <p:nvPr/>
           </p:nvSpPr>
           <p:spPr>
             <a:xfrm rot="-5400000">
-              <a:off x="-304395" y="3845129"/>
+              <a:off x="-304395" y="3857153"/>
               <a:ext cx="1827885" cy="127558"/>
             </a:xfrm>
             <a:prstGeom prst="rect">
@@ -5126,14 +5495,14 @@
         </p:sp>
         <p:sp>
           <p:nvSpPr>
-            <p:cNvPr id="71" name="tx71"/>
-            <p:cNvSpPr/>
-            <p:nvPr/>
-          </p:nvSpPr>
-          <p:spPr>
-            <a:xfrm>
-              <a:off x="994649" y="1980515"/>
-              <a:ext cx="2723174" cy="109362"/>
+            <p:cNvPr id="80" name="tx80"/>
+            <p:cNvSpPr/>
+            <p:nvPr/>
+          </p:nvSpPr>
+          <p:spPr>
+            <a:xfrm>
+              <a:off x="994649" y="1980332"/>
+              <a:ext cx="1859066" cy="100218"/>
             </a:xfrm>
             <a:prstGeom prst="rect">
               <a:avLst/>
@@ -5146,7 +5515,7 @@
             <a:p>
               <a:pPr algn="l" marL="0" marR="0" indent="0">
                 <a:lnSpc>
-                  <a:spcPts val="1200"/>
+                  <a:spcPts val="1100"/>
                 </a:lnSpc>
                 <a:spcBef>
                   <a:spcPts val="0"/>
@@ -5156,7 +5525,7 @@
                 </a:spcAft>
               </a:pPr>
               <a:r>
-                <a:rPr sz="1200">
+                <a:rPr sz="1100">
                   <a:solidFill>
                     <a:srgbClr val="404040">
                       <a:alpha val="100000"/>
@@ -5165,21 +5534,21 @@
                   <a:latin typeface="Helvetica"/>
                   <a:cs typeface="Helvetica"/>
                 </a:rPr>
-                <a:t>eGFR difference = (BSA-adjusted eGFR</a:t>
+                <a:t>eGFR difference (%) = (eGFR</a:t>
               </a:r>
             </a:p>
           </p:txBody>
         </p:sp>
         <p:sp>
           <p:nvSpPr>
-            <p:cNvPr id="72" name="tx72"/>
-            <p:cNvSpPr/>
-            <p:nvPr/>
-          </p:nvSpPr>
-          <p:spPr>
-            <a:xfrm>
-              <a:off x="3717823" y="2041341"/>
-              <a:ext cx="76992" cy="76443"/>
+            <p:cNvPr id="81" name="tx81"/>
+            <p:cNvSpPr/>
+            <p:nvPr/>
+          </p:nvSpPr>
+          <p:spPr>
+            <a:xfrm>
+              <a:off x="2853715" y="2036078"/>
+              <a:ext cx="70500" cy="70043"/>
             </a:xfrm>
             <a:prstGeom prst="rect">
               <a:avLst/>
@@ -5192,7 +5561,7 @@
             <a:p>
               <a:pPr algn="l" marL="0" marR="0" indent="0">
                 <a:lnSpc>
-                  <a:spcPts val="839"/>
+                  <a:spcPts val="769"/>
                 </a:lnSpc>
                 <a:spcBef>
                   <a:spcPts val="0"/>
@@ -5202,7 +5571,7 @@
                 </a:spcAft>
               </a:pPr>
               <a:r>
-                <a:rPr sz="839">
+                <a:rPr sz="769">
                   <a:solidFill>
                     <a:srgbClr val="404040">
                       <a:alpha val="100000"/>
@@ -5218,14 +5587,14 @@
         </p:sp>
         <p:sp>
           <p:nvSpPr>
-            <p:cNvPr id="73" name="tx73"/>
-            <p:cNvSpPr/>
-            <p:nvPr/>
-          </p:nvSpPr>
-          <p:spPr>
-            <a:xfrm>
-              <a:off x="3794816" y="2041341"/>
-              <a:ext cx="76992" cy="76443"/>
+            <p:cNvPr id="82" name="tx82"/>
+            <p:cNvSpPr/>
+            <p:nvPr/>
+          </p:nvSpPr>
+          <p:spPr>
+            <a:xfrm>
+              <a:off x="2924216" y="2036078"/>
+              <a:ext cx="70500" cy="70043"/>
             </a:xfrm>
             <a:prstGeom prst="rect">
               <a:avLst/>
@@ -5238,7 +5607,7 @@
             <a:p>
               <a:pPr algn="l" marL="0" marR="0" indent="0">
                 <a:lnSpc>
-                  <a:spcPts val="839"/>
+                  <a:spcPts val="769"/>
                 </a:lnSpc>
                 <a:spcBef>
                   <a:spcPts val="0"/>
@@ -5248,7 +5617,7 @@
                 </a:spcAft>
               </a:pPr>
               <a:r>
-                <a:rPr sz="839">
+                <a:rPr sz="769">
                   <a:solidFill>
                     <a:srgbClr val="404040">
                       <a:alpha val="100000"/>
@@ -5264,14 +5633,14 @@
         </p:sp>
         <p:sp>
           <p:nvSpPr>
-            <p:cNvPr id="74" name="tx74"/>
-            <p:cNvSpPr/>
-            <p:nvPr/>
-          </p:nvSpPr>
-          <p:spPr>
-            <a:xfrm>
-              <a:off x="3871808" y="2023784"/>
-              <a:ext cx="58521" cy="94000"/>
+            <p:cNvPr id="83" name="tx83"/>
+            <p:cNvSpPr/>
+            <p:nvPr/>
+          </p:nvSpPr>
+          <p:spPr>
+            <a:xfrm>
+              <a:off x="2994716" y="2019985"/>
+              <a:ext cx="53583" cy="86136"/>
             </a:xfrm>
             <a:prstGeom prst="rect">
               <a:avLst/>
@@ -5284,7 +5653,7 @@
             <a:p>
               <a:pPr algn="l" marL="0" marR="0" indent="0">
                 <a:lnSpc>
-                  <a:spcPts val="839"/>
+                  <a:spcPts val="769"/>
                 </a:lnSpc>
                 <a:spcBef>
                   <a:spcPts val="0"/>
@@ -5294,7 +5663,7 @@
                 </a:spcAft>
               </a:pPr>
               <a:r>
-                <a:rPr sz="839">
+                <a:rPr sz="769">
                   <a:solidFill>
                     <a:srgbClr val="404040">
                       <a:alpha val="100000"/>
@@ -5310,14 +5679,14 @@
         </p:sp>
         <p:sp>
           <p:nvSpPr>
-            <p:cNvPr id="75" name="tx75"/>
-            <p:cNvSpPr/>
-            <p:nvPr/>
-          </p:nvSpPr>
-          <p:spPr>
-            <a:xfrm>
-              <a:off x="3930330" y="2041341"/>
-              <a:ext cx="76992" cy="76443"/>
+            <p:cNvPr id="84" name="tx84"/>
+            <p:cNvSpPr/>
+            <p:nvPr/>
+          </p:nvSpPr>
+          <p:spPr>
+            <a:xfrm>
+              <a:off x="3048300" y="2036078"/>
+              <a:ext cx="70500" cy="70043"/>
             </a:xfrm>
             <a:prstGeom prst="rect">
               <a:avLst/>
@@ -5330,7 +5699,7 @@
             <a:p>
               <a:pPr algn="l" marL="0" marR="0" indent="0">
                 <a:lnSpc>
-                  <a:spcPts val="839"/>
+                  <a:spcPts val="769"/>
                 </a:lnSpc>
                 <a:spcBef>
                   <a:spcPts val="0"/>
@@ -5340,7 +5709,7 @@
                 </a:spcAft>
               </a:pPr>
               <a:r>
-                <a:rPr sz="839">
+                <a:rPr sz="769">
                   <a:solidFill>
                     <a:srgbClr val="404040">
                       <a:alpha val="100000"/>
@@ -5356,14 +5725,14 @@
         </p:sp>
         <p:sp>
           <p:nvSpPr>
-            <p:cNvPr id="76" name="tx76"/>
-            <p:cNvSpPr/>
-            <p:nvPr/>
-          </p:nvSpPr>
-          <p:spPr>
-            <a:xfrm>
-              <a:off x="4007322" y="2041341"/>
-              <a:ext cx="71048" cy="76443"/>
+            <p:cNvPr id="85" name="tx85"/>
+            <p:cNvSpPr/>
+            <p:nvPr/>
+          </p:nvSpPr>
+          <p:spPr>
+            <a:xfrm>
+              <a:off x="3118800" y="2036078"/>
+              <a:ext cx="65105" cy="70043"/>
             </a:xfrm>
             <a:prstGeom prst="rect">
               <a:avLst/>
@@ -5376,7 +5745,7 @@
             <a:p>
               <a:pPr algn="l" marL="0" marR="0" indent="0">
                 <a:lnSpc>
-                  <a:spcPts val="839"/>
+                  <a:spcPts val="769"/>
                 </a:lnSpc>
                 <a:spcBef>
                   <a:spcPts val="0"/>
@@ -5386,7 +5755,7 @@
                 </a:spcAft>
               </a:pPr>
               <a:r>
-                <a:rPr sz="839">
+                <a:rPr sz="769">
                   <a:solidFill>
                     <a:srgbClr val="404040">
                       <a:alpha val="100000"/>
@@ -5402,14 +5771,14 @@
         </p:sp>
         <p:sp>
           <p:nvSpPr>
-            <p:cNvPr id="77" name="tx77"/>
-            <p:cNvSpPr/>
-            <p:nvPr/>
-          </p:nvSpPr>
-          <p:spPr>
-            <a:xfrm>
-              <a:off x="4078371" y="2041341"/>
-              <a:ext cx="71048" cy="76443"/>
+            <p:cNvPr id="86" name="tx86"/>
+            <p:cNvSpPr/>
+            <p:nvPr/>
+          </p:nvSpPr>
+          <p:spPr>
+            <a:xfrm>
+              <a:off x="3183905" y="2036078"/>
+              <a:ext cx="65105" cy="70043"/>
             </a:xfrm>
             <a:prstGeom prst="rect">
               <a:avLst/>
@@ -5422,7 +5791,7 @@
             <a:p>
               <a:pPr algn="l" marL="0" marR="0" indent="0">
                 <a:lnSpc>
-                  <a:spcPts val="839"/>
+                  <a:spcPts val="769"/>
                 </a:lnSpc>
                 <a:spcBef>
                   <a:spcPts val="0"/>
@@ -5432,7 +5801,7 @@
                 </a:spcAft>
               </a:pPr>
               <a:r>
-                <a:rPr sz="839">
+                <a:rPr sz="769">
                   <a:solidFill>
                     <a:srgbClr val="404040">
                       <a:alpha val="100000"/>
@@ -5448,14 +5817,14 @@
         </p:sp>
         <p:sp>
           <p:nvSpPr>
-            <p:cNvPr id="78" name="tx78"/>
-            <p:cNvSpPr/>
-            <p:nvPr/>
-          </p:nvSpPr>
-          <p:spPr>
-            <a:xfrm>
-              <a:off x="4149420" y="1980515"/>
-              <a:ext cx="478414" cy="109362"/>
+            <p:cNvPr id="87" name="tx87"/>
+            <p:cNvSpPr/>
+            <p:nvPr/>
+          </p:nvSpPr>
+          <p:spPr>
+            <a:xfrm>
+              <a:off x="3249010" y="1980332"/>
+              <a:ext cx="438363" cy="100218"/>
             </a:xfrm>
             <a:prstGeom prst="rect">
               <a:avLst/>
@@ -5468,7 +5837,7 @@
             <a:p>
               <a:pPr algn="l" marL="0" marR="0" indent="0">
                 <a:lnSpc>
-                  <a:spcPts val="1200"/>
+                  <a:spcPts val="1100"/>
                 </a:lnSpc>
                 <a:spcBef>
                   <a:spcPts val="0"/>
@@ -5478,7 +5847,7 @@
                 </a:spcAft>
               </a:pPr>
               <a:r>
-                <a:rPr sz="1200">
+                <a:rPr sz="1100">
                   <a:solidFill>
                     <a:srgbClr val="404040">
                       <a:alpha val="100000"/>
@@ -5494,14 +5863,14 @@
         </p:sp>
         <p:sp>
           <p:nvSpPr>
-            <p:cNvPr id="79" name="tx79"/>
-            <p:cNvSpPr/>
-            <p:nvPr/>
-          </p:nvSpPr>
-          <p:spPr>
-            <a:xfrm>
-              <a:off x="4627834" y="2041341"/>
-              <a:ext cx="76992" cy="76443"/>
+            <p:cNvPr id="88" name="tx88"/>
+            <p:cNvSpPr/>
+            <p:nvPr/>
+          </p:nvSpPr>
+          <p:spPr>
+            <a:xfrm>
+              <a:off x="3687374" y="2036078"/>
+              <a:ext cx="70500" cy="70043"/>
             </a:xfrm>
             <a:prstGeom prst="rect">
               <a:avLst/>
@@ -5514,7 +5883,7 @@
             <a:p>
               <a:pPr algn="l" marL="0" marR="0" indent="0">
                 <a:lnSpc>
-                  <a:spcPts val="839"/>
+                  <a:spcPts val="769"/>
                 </a:lnSpc>
                 <a:spcBef>
                   <a:spcPts val="0"/>
@@ -5524,7 +5893,7 @@
                 </a:spcAft>
               </a:pPr>
               <a:r>
-                <a:rPr sz="839">
+                <a:rPr sz="769">
                   <a:solidFill>
                     <a:srgbClr val="404040">
                       <a:alpha val="100000"/>
@@ -5540,14 +5909,14 @@
         </p:sp>
         <p:sp>
           <p:nvSpPr>
-            <p:cNvPr id="80" name="tx80"/>
-            <p:cNvSpPr/>
-            <p:nvPr/>
-          </p:nvSpPr>
-          <p:spPr>
-            <a:xfrm>
-              <a:off x="4704827" y="2041341"/>
-              <a:ext cx="82844" cy="76443"/>
+            <p:cNvPr id="89" name="tx89"/>
+            <p:cNvSpPr/>
+            <p:nvPr/>
+          </p:nvSpPr>
+          <p:spPr>
+            <a:xfrm>
+              <a:off x="3757874" y="2036078"/>
+              <a:ext cx="75986" cy="70043"/>
             </a:xfrm>
             <a:prstGeom prst="rect">
               <a:avLst/>
@@ -5560,7 +5929,7 @@
             <a:p>
               <a:pPr algn="l" marL="0" marR="0" indent="0">
                 <a:lnSpc>
-                  <a:spcPts val="839"/>
+                  <a:spcPts val="769"/>
                 </a:lnSpc>
                 <a:spcBef>
                   <a:spcPts val="0"/>
@@ -5570,7 +5939,7 @@
                 </a:spcAft>
               </a:pPr>
               <a:r>
-                <a:rPr sz="839">
+                <a:rPr sz="769">
                   <a:solidFill>
                     <a:srgbClr val="404040">
                       <a:alpha val="100000"/>
@@ -5586,14 +5955,14 @@
         </p:sp>
         <p:sp>
           <p:nvSpPr>
-            <p:cNvPr id="81" name="tx81"/>
-            <p:cNvSpPr/>
-            <p:nvPr/>
-          </p:nvSpPr>
-          <p:spPr>
-            <a:xfrm>
-              <a:off x="4787671" y="1980515"/>
-              <a:ext cx="482528" cy="109362"/>
+            <p:cNvPr id="90" name="tx90"/>
+            <p:cNvSpPr/>
+            <p:nvPr/>
+          </p:nvSpPr>
+          <p:spPr>
+            <a:xfrm>
+              <a:off x="3833861" y="1980332"/>
+              <a:ext cx="442112" cy="100218"/>
             </a:xfrm>
             <a:prstGeom prst="rect">
               <a:avLst/>
@@ -5606,7 +5975,7 @@
             <a:p>
               <a:pPr algn="l" marL="0" marR="0" indent="0">
                 <a:lnSpc>
-                  <a:spcPts val="1200"/>
+                  <a:spcPts val="1100"/>
                 </a:lnSpc>
                 <a:spcBef>
                   <a:spcPts val="0"/>
@@ -5616,7 +5985,7 @@
                 </a:spcAft>
               </a:pPr>
               <a:r>
-                <a:rPr sz="1200">
+                <a:rPr sz="1100">
                   <a:solidFill>
                     <a:srgbClr val="404040">
                       <a:alpha val="100000"/>
@@ -5632,14 +6001,14 @@
         </p:sp>
         <p:sp>
           <p:nvSpPr>
-            <p:cNvPr id="82" name="tx82"/>
-            <p:cNvSpPr/>
-            <p:nvPr/>
-          </p:nvSpPr>
-          <p:spPr>
-            <a:xfrm>
-              <a:off x="5270200" y="2041341"/>
-              <a:ext cx="76992" cy="76443"/>
+            <p:cNvPr id="91" name="tx91"/>
+            <p:cNvSpPr/>
+            <p:nvPr/>
+          </p:nvSpPr>
+          <p:spPr>
+            <a:xfrm>
+              <a:off x="4275973" y="2036078"/>
+              <a:ext cx="70500" cy="70043"/>
             </a:xfrm>
             <a:prstGeom prst="rect">
               <a:avLst/>
@@ -5652,7 +6021,7 @@
             <a:p>
               <a:pPr algn="l" marL="0" marR="0" indent="0">
                 <a:lnSpc>
-                  <a:spcPts val="839"/>
+                  <a:spcPts val="769"/>
                 </a:lnSpc>
                 <a:spcBef>
                   <a:spcPts val="0"/>
@@ -5662,7 +6031,7 @@
                 </a:spcAft>
               </a:pPr>
               <a:r>
-                <a:rPr sz="839">
+                <a:rPr sz="769">
                   <a:solidFill>
                     <a:srgbClr val="404040">
                       <a:alpha val="100000"/>
@@ -5678,14 +6047,14 @@
         </p:sp>
         <p:sp>
           <p:nvSpPr>
-            <p:cNvPr id="83" name="tx83"/>
-            <p:cNvSpPr/>
-            <p:nvPr/>
-          </p:nvSpPr>
-          <p:spPr>
-            <a:xfrm>
-              <a:off x="5347193" y="2041341"/>
-              <a:ext cx="82844" cy="76443"/>
+            <p:cNvPr id="92" name="tx92"/>
+            <p:cNvSpPr/>
+            <p:nvPr/>
+          </p:nvSpPr>
+          <p:spPr>
+            <a:xfrm>
+              <a:off x="4346473" y="2036078"/>
+              <a:ext cx="75986" cy="70043"/>
             </a:xfrm>
             <a:prstGeom prst="rect">
               <a:avLst/>
@@ -5698,7 +6067,7 @@
             <a:p>
               <a:pPr algn="l" marL="0" marR="0" indent="0">
                 <a:lnSpc>
-                  <a:spcPts val="839"/>
+                  <a:spcPts val="769"/>
                 </a:lnSpc>
                 <a:spcBef>
                   <a:spcPts val="0"/>
@@ -5708,7 +6077,7 @@
                 </a:spcAft>
               </a:pPr>
               <a:r>
-                <a:rPr sz="839">
+                <a:rPr sz="769">
                   <a:solidFill>
                     <a:srgbClr val="404040">
                       <a:alpha val="100000"/>
@@ -5724,7 +6093,53 @@
         </p:sp>
         <p:sp>
           <p:nvSpPr>
-            <p:cNvPr id="84" name="tx84"/>
+            <p:cNvPr id="93" name="tx93"/>
+            <p:cNvSpPr/>
+            <p:nvPr/>
+          </p:nvSpPr>
+          <p:spPr>
+            <a:xfrm>
+              <a:off x="4422460" y="1980332"/>
+              <a:ext cx="1906249" cy="100218"/>
+            </a:xfrm>
+            <a:prstGeom prst="rect">
+              <a:avLst/>
+            </a:prstGeom>
+            <a:noFill/>
+          </p:spPr>
+          <p:txBody>
+            <a:bodyPr lIns="0" rIns="0" tIns="0" bIns="0" anchorCtr="1" anchor="ctr" wrap="none"/>
+            <a:lstStyle/>
+            <a:p>
+              <a:pPr algn="l" marL="0" marR="0" indent="0">
+                <a:lnSpc>
+                  <a:spcPts val="1100"/>
+                </a:lnSpc>
+                <a:spcBef>
+                  <a:spcPts val="0"/>
+                </a:spcBef>
+                <a:spcAft>
+                  <a:spcPts val="0"/>
+                </a:spcAft>
+              </a:pPr>
+              <a:r>
+                <a:rPr sz="1100">
+                  <a:solidFill>
+                    <a:srgbClr val="404040">
+                      <a:alpha val="100000"/>
+                    </a:srgbClr>
+                  </a:solidFill>
+                  <a:latin typeface="Helvetica"/>
+                  <a:cs typeface="Helvetica"/>
+                </a:rPr>
+                <a:t> × 100;  red line = −10 % cutoff</a:t>
+              </a:r>
+            </a:p>
+          </p:txBody>
+        </p:sp>
+        <p:sp>
+          <p:nvSpPr>
+            <p:cNvPr id="94" name="tx94"/>
             <p:cNvSpPr/>
             <p:nvPr/>
           </p:nvSpPr>
